--- a/clauseguard/docs/deck/ClauseGuard_deck.pptx
+++ b/clauseguard/docs/deck/ClauseGuard_deck.pptx
@@ -791,7 +791,7 @@
           <a:lstStyle/>
           <a:p>
             <a:r>
-              <a:t>This is the system on one slide. Documents enter through a quarantined extractor and land in the typed clause store. The solvers, written in plain Python, read the store. The planner sees the user's text and tool names only, never document text, and proposes tool calls that an enforcement point in ordinary code accepts or denies. Coordination rules are a data file per jurisdiction: an Indonesian pack with statutory schemes first, and a generic pack for a US or UK household. Every decision is written to a hash-chained audit log.</a:t>
+              <a:t>One slide, two halves. The agents read: a Document Reader turns a policy into typed rules, a Conversation Agent reads each message in context, a Fact Agent binds the facts, an Explainer words the answer in the customer's language, a Watchdog watches deadlines. Code decides: the solvers, the permission enforcer and the audit log. For a claim, the agent lays out the insurer's own form from that insurer's wording, fills it from typed facts, shows it before the Confirm tap and files the uploaded documents with it. On the other side a claims desk, behind its own token, reviews, decides with a note and can halt the agent; the decision flows back to the customer's chat.</a:t>
             </a:r>
           </a:p>
         </p:txBody>
@@ -1071,7 +1071,7 @@
           <a:lstStyle/>
           <a:p>
             <a:r>
-              <a:t>Our numbers, with their limits. Scripted tasks pass thirty-three of thirty-three. Two off-script batches pass fully but are development sets; the blind batch, written and run once, passes three of fourteen, the honest generalisation figure for the rule layer. Clarification asks when it should in eighty-seven percent of cases and never asks when it should not. On the public benchmark the extracted-tuple system is at parity with a strong long-context baseline, not above it. The CMS plan experiment is honest too: every marketplace plan covers the same perils, so the optimiser and the baselines pick the same plan.</a:t>
+              <a:t>Our numbers, with their limits. Scripted tasks pass thirty-three of thirty-three. Two off-script batches pass fully but are development sets; the blind batch, written and run once, passes three of fourteen, the honest generalisation figure for the rule layer. Clarification asks when it should in eighty-seven percent of cases and never asks when it should not. On the public benchmark, the old 82.9-vs-87.5 "parity" claim compared different item counts and has been corrected; held-out accuracy is 84.1% both before and after the extraction fixes, and the baseline comparison on clean held-out data could not be completed this cycle. The CMS plan experiment is honest too: every marketplace plan covers the same perils, so the optimiser and the baselines pick the same plan.</a:t>
             </a:r>
           </a:p>
         </p:txBody>
@@ -1141,7 +1141,7 @@
           <a:lstStyle/>
           <a:p>
             <a:r>
-              <a:t>Three scenes. A student asks about a dengue stay and gets the covered amount, the clause, the filing deadline and an unprompted warning about an unpaid premium; the Timeline card lists every date with money at risk. A delivery rider crashed: the Claim allocation card shows who pays what, and the Pre-check card lists the grounds an insurer would raise and which are fixable. A family uploads an invoice with hidden white text; it is blocked, the bill is split across the group plan and the stacking rider, and Plan options closes the remaining gaps within a budget.</a:t>
+              <a:t>One story end to end. A student with dengue asks what he gets; the answer is the amount, the deadline and the sentence of the policy that decides it, with one question about the hospital. He attaches four hospital documents in one go; the assistant reads them, ticks the insurer's own document list, takes the bill from the invoice and shows Sompo's claim form, which he can download. He taps Confirm, the claim lands on the insurer's desk with the attachments, a person approves it with a note, and the decision appears in his chat. Then a delivery rider with four policies, the what-if panel, and an attack that ends in a ticket.</a:t>
             </a:r>
           </a:p>
         </p:txBody>
@@ -4526,7 +4526,7 @@
                 </a:solidFill>
                 <a:latin typeface="Calibri"/>
               </a:rPr>
-              <a:t>Not built: anchoring the audit chain outside the host; insurer API integration</a:t>
+              <a:t>Not built: anchoring the audit chain outside the host; integration with a real insurer's API (the desk is a sandbox)</a:t>
             </a:r>
           </a:p>
           <a:p>
@@ -4551,7 +4551,7 @@
                 </a:solidFill>
                 <a:latin typeface="Calibri"/>
               </a:rPr>
-              <a:t>Code, tests, evidence and limitations are in the repository</a:t>
+              <a:t>Running: web client on Vercel, Postgres audit chain on Supabase, backend as a Docker image; code, tests, evidence and limitations in the repository</a:t>
             </a:r>
           </a:p>
         </p:txBody>
@@ -5732,7 +5732,7 @@
                 </a:solidFill>
                 <a:latin typeface="Calibri"/>
               </a:rPr>
-              <a:t>Policy PDF or CMS row, quarantined extractor, typed clause store, four solvers, cited reply</a:t>
+              <a:t>Agents that read: Document Reader (policy PDF to typed rules), Conversation Agent (new situation, follow-up, correction, what-if), Fact Agent, Explainer, Watchdog</a:t>
             </a:r>
           </a:p>
           <a:p>
@@ -5757,7 +5757,7 @@
                 </a:solidFill>
                 <a:latin typeface="Calibri"/>
               </a:rPr>
-              <a:t>Planner proposes intent and tool names; a code-only enforcement point decides what runs</a:t>
+              <a:t>Code that decides: four solvers, the permission enforcer (T0 to T3), the hash-chained audit log</a:t>
             </a:r>
           </a:p>
           <a:p>
@@ -5782,7 +5782,7 @@
                 </a:solidFill>
                 <a:latin typeface="Calibri"/>
               </a:rPr>
-              <a:t>Uploaded documents pass a hidden-text scan and a quarantined extractor; typed fields only</a:t>
+              <a:t>Claims: the insurer's own form laid out from its clauses, filled from typed facts, shown before Confirm; uploads matched to the policy's document list</a:t>
             </a:r>
           </a:p>
           <a:p>
@@ -5807,7 +5807,7 @@
                 </a:solidFill>
                 <a:latin typeface="Calibri"/>
               </a:rPr>
-              <a:t>Hash-chained audit log, output guard, kill switch</a:t>
+              <a:t>Insurer side: a claims desk receives form and attachments, decides with a note, can halt the agent; the decision returns to the customer</a:t>
             </a:r>
           </a:p>
           <a:p>
@@ -6919,7 +6919,7 @@
                 </a:solidFill>
                 <a:latin typeface="Calibri"/>
               </a:rPr>
-              <a:t>Public benchmark, in solver scope: 82.9 vs 87.5 for a long-context closed-world baseline; 11 vs 12 discordant pairs, p = 1.000: parity</a:t>
+              <a:t>Public benchmark: previous in-scope comparison (82.9 vs 87.5) used mismatched item counts and is corrected; held-out accuracy after the extraction fixes is 84.1%, unchanged from before the fixes; baseline comparison on held-out data not completed (API quota)</a:t>
             </a:r>
           </a:p>
           <a:p>
@@ -7074,7 +7074,7 @@
                 </a:solidFill>
                 <a:latin typeface="Calibri"/>
               </a:rPr>
-              <a:t>Demo, the Entitlement tab</a:t>
+              <a:t>Demo, from question to decision</a:t>
             </a:r>
           </a:p>
         </p:txBody>
@@ -7107,7 +7107,7 @@
               </a:spcAft>
             </a:pPr>
             <a:r>
-              <a:rPr sz="1600" b="1">
+              <a:rPr sz="1300" b="1">
                 <a:solidFill>
                   <a:srgbClr val="0B6E6E"/>
                 </a:solidFill>
@@ -7116,13 +7116,13 @@
               <a:t>■  </a:t>
             </a:r>
             <a:r>
-              <a:rPr sz="2200" b="0">
+              <a:rPr sz="1900" b="0">
                 <a:solidFill>
                   <a:srgbClr val="1F2933"/>
                 </a:solidFill>
                 <a:latin typeface="Calibri"/>
               </a:rPr>
-              <a:t>Scene 1, Rizky: dengue stay, COVERED with the clause, deadline 2026-12-06, unprompted premium alert; Timeline and Recourse cards</a:t>
+              <a:t>Rizky, dengue, three days: covered Rp 1.5 million, filing deadline, the clause; one question (partner hospital?) and the BPJS answer follows</a:t>
             </a:r>
           </a:p>
           <a:p>
@@ -7132,7 +7132,7 @@
               </a:spcAft>
             </a:pPr>
             <a:r>
-              <a:rPr sz="1600" b="1">
+              <a:rPr sz="1300" b="1">
                 <a:solidFill>
                   <a:srgbClr val="0B6E6E"/>
                 </a:solidFill>
@@ -7141,13 +7141,13 @@
               <a:t>■  </a:t>
             </a:r>
             <a:r>
-              <a:rPr sz="2200" b="0">
+              <a:rPr sz="1900" b="0">
                 <a:solidFill>
                   <a:srgbClr val="1F2933"/>
                 </a:solidFill>
                 <a:latin typeface="Calibri"/>
               </a:rPr>
-              <a:t>Scene 2, Dewi: motorbike crash, payer order, one question; Claim allocation and Pre-check cards with denial grounds and fixable badges</a:t>
+              <a:t>Four hospital documents uploaded at once: read, matched to Sompo's list, bill Rp 2.6 million taken from the invoice; the Sompo claim form appears, downloadable as PDF</a:t>
             </a:r>
           </a:p>
           <a:p>
@@ -7157,7 +7157,7 @@
               </a:spcAft>
             </a:pPr>
             <a:r>
-              <a:rPr sz="1600" b="1">
+              <a:rPr sz="1300" b="1">
                 <a:solidFill>
                   <a:srgbClr val="0B6E6E"/>
                 </a:solidFill>
@@ -7166,13 +7166,13 @@
               <a:t>■  </a:t>
             </a:r>
             <a:r>
-              <a:rPr sz="2200" b="0">
+              <a:rPr sz="1900" b="0">
                 <a:solidFill>
                   <a:srgbClr val="1F2933"/>
                 </a:solidFill>
                 <a:latin typeface="Calibri"/>
               </a:rPr>
-              <a:t>Scene 3, Santoso family: invoice with hidden white text blocked; Allocation splits the bill; Plan options close the family's gaps under a budget</a:t>
+              <a:t>Confirm: the claim and its attachments reach the insurer's desk; approved there with a note; the customer's digest shows the decision</a:t>
             </a:r>
           </a:p>
           <a:p>
@@ -7182,7 +7182,7 @@
               </a:spcAft>
             </a:pPr>
             <a:r>
-              <a:rPr sz="1600" b="1">
+              <a:rPr sz="1300" b="1">
                 <a:solidFill>
                   <a:srgbClr val="0B6E6E"/>
                 </a:solidFill>
@@ -7191,13 +7191,38 @@
               <a:t>■  </a:t>
             </a:r>
             <a:r>
-              <a:rPr sz="2200" b="0">
+              <a:rPr sz="1900" b="0">
                 <a:solidFill>
                   <a:srgbClr val="1F2933"/>
                 </a:solidFill>
                 <a:latin typeface="Calibri"/>
               </a:rPr>
-              <a:t>Attack buttons: payout-account change refused with a ticket; cross-tenant request denied; audit chain verified, tamper detected</a:t>
+              <a:t>Dewi, motorbike crash with four policies: who pays first, the expired licence, what-if with a valid one</a:t>
+            </a:r>
+          </a:p>
+          <a:p>
+            <a:pPr>
+              <a:spcAft>
+                <a:spcPts val="1200"/>
+              </a:spcAft>
+            </a:pPr>
+            <a:r>
+              <a:rPr sz="1300" b="1">
+                <a:solidFill>
+                  <a:srgbClr val="0B6E6E"/>
+                </a:solidFill>
+                <a:latin typeface="Calibri"/>
+              </a:rPr>
+              <a:t>■  </a:t>
+            </a:r>
+            <a:r>
+              <a:rPr sz="1900" b="0">
+                <a:solidFill>
+                  <a:srgbClr val="1F2933"/>
+                </a:solidFill>
+                <a:latin typeface="Calibri"/>
+              </a:rPr>
+              <a:t>Attack: payout-account change goes to a ticket, nothing changes; the audit chain verifies and a tampered copy breaks</a:t>
             </a:r>
           </a:p>
         </p:txBody>

--- a/clauseguard/docs/deck/ClauseGuard_deck.pptx
+++ b/clauseguard/docs/deck/ClauseGuard_deck.pptx
@@ -13,8 +13,6 @@
     <p:sldId id="261" r:id="rId13"/>
     <p:sldId id="262" r:id="rId14"/>
     <p:sldId id="263" r:id="rId15"/>
-    <p:sldId id="264" r:id="rId16"/>
-    <p:sldId id="265" r:id="rId17"/>
   </p:sldIdLst>
   <p:sldSz cx="12191695" cy="6858000" type="screen4x3"/>
   <p:notesSz cx="6858000" cy="9144000"/>
@@ -114,6 +112,310 @@
     </a:lvl9pPr>
   </p:defaultTextStyle>
 </p:presentation>
+</file>
+
+<file path=ppt/charts/chart1.xml><?xml version="1.0" encoding="utf-8"?>
+<c:chartSpace xmlns:c="http://schemas.openxmlformats.org/drawingml/2006/chart" xmlns:a="http://schemas.openxmlformats.org/drawingml/2006/main" xmlns:r="http://schemas.openxmlformats.org/officeDocument/2006/relationships">
+  <c:date1904 val="0"/>
+  <c:chart>
+    <c:autoTitleDeleted val="0"/>
+    <c:plotArea>
+      <c:barChart>
+        <c:barDir val="col"/>
+        <c:grouping val="clustered"/>
+        <c:ser>
+          <c:idx val="0"/>
+          <c:order val="0"/>
+          <c:tx>
+            <c:strRef>
+              <c:f>Sheet1!$B$1</c:f>
+              <c:strCache>
+                <c:ptCount val="1"/>
+                <c:pt idx="0">
+                  <c:v>Accuracy (%)</c:v>
+                </c:pt>
+              </c:strCache>
+            </c:strRef>
+          </c:tx>
+          <c:spPr>
+            <a:solidFill>
+              <a:srgbClr val="1E40AF"/>
+            </a:solidFill>
+          </c:spPr>
+          <c:dPt>
+            <c:idx val="0"/>
+            <c:spPr>
+              <a:solidFill>
+                <a:srgbClr val="B6BDC9"/>
+              </a:solidFill>
+            </c:spPr>
+          </c:dPt>
+          <c:dPt>
+            <c:idx val="1"/>
+            <c:spPr>
+              <a:solidFill>
+                <a:srgbClr val="B6BDC9"/>
+              </a:solidFill>
+            </c:spPr>
+          </c:dPt>
+          <c:dPt>
+            <c:idx val="2"/>
+            <c:spPr>
+              <a:solidFill>
+                <a:srgbClr val="B6BDC9"/>
+              </a:solidFill>
+            </c:spPr>
+          </c:dPt>
+          <c:dPt>
+            <c:idx val="3"/>
+            <c:spPr>
+              <a:solidFill>
+                <a:srgbClr val="1E40AF"/>
+              </a:solidFill>
+            </c:spPr>
+          </c:dPt>
+          <c:cat>
+            <c:strRef>
+              <c:f>Sheet1!$A$2:$A$5</c:f>
+              <c:strCache>
+                <c:ptCount val="4"/>
+                <c:pt idx="0">
+                  <c:v>Gemini 3</c:v>
+                </c:pt>
+                <c:pt idx="1">
+                  <c:v>ChatGPT 5.3</c:v>
+                </c:pt>
+                <c:pt idx="2">
+                  <c:v>Claude Sonnet 4.6</c:v>
+                </c:pt>
+                <c:pt idx="3">
+                  <c:v>ClauseGuard</c:v>
+                </c:pt>
+              </c:strCache>
+            </c:strRef>
+          </c:cat>
+          <c:val>
+            <c:numRef>
+              <c:f>Sheet1!$B$2:$B$5</c:f>
+              <c:numCache>
+                <c:formatCode>General</c:formatCode>
+                <c:ptCount val="4"/>
+                <c:pt idx="0">
+                  <c:v>65.2</c:v>
+                </c:pt>
+                <c:pt idx="1">
+                  <c:v>72.9</c:v>
+                </c:pt>
+                <c:pt idx="2">
+                  <c:v>87.8</c:v>
+                </c:pt>
+                <c:pt idx="3">
+                  <c:v>84.6</c:v>
+                </c:pt>
+              </c:numCache>
+            </c:numRef>
+          </c:val>
+        </c:ser>
+        <c:ser>
+          <c:idx val="1"/>
+          <c:order val="1"/>
+          <c:tx>
+            <c:strRef>
+              <c:f>Sheet1!$C$1</c:f>
+              <c:strCache>
+                <c:ptCount val="1"/>
+                <c:pt idx="0">
+                  <c:v>Fabricated denials (%)</c:v>
+                </c:pt>
+              </c:strCache>
+            </c:strRef>
+          </c:tx>
+          <c:spPr>
+            <a:solidFill>
+              <a:srgbClr val="C2410C"/>
+            </a:solidFill>
+          </c:spPr>
+          <c:dPt>
+            <c:idx val="0"/>
+            <c:spPr>
+              <a:solidFill>
+                <a:srgbClr val="E2B3A3"/>
+              </a:solidFill>
+            </c:spPr>
+          </c:dPt>
+          <c:dPt>
+            <c:idx val="1"/>
+            <c:spPr>
+              <a:solidFill>
+                <a:srgbClr val="E2B3A3"/>
+              </a:solidFill>
+            </c:spPr>
+          </c:dPt>
+          <c:dPt>
+            <c:idx val="2"/>
+            <c:spPr>
+              <a:solidFill>
+                <a:srgbClr val="E2B3A3"/>
+              </a:solidFill>
+            </c:spPr>
+          </c:dPt>
+          <c:dPt>
+            <c:idx val="3"/>
+            <c:spPr>
+              <a:solidFill>
+                <a:srgbClr val="C2410C"/>
+              </a:solidFill>
+            </c:spPr>
+          </c:dPt>
+          <c:cat>
+            <c:strRef>
+              <c:f>Sheet1!$A$2:$A$5</c:f>
+              <c:strCache>
+                <c:ptCount val="4"/>
+                <c:pt idx="0">
+                  <c:v>Gemini 3</c:v>
+                </c:pt>
+                <c:pt idx="1">
+                  <c:v>ChatGPT 5.3</c:v>
+                </c:pt>
+                <c:pt idx="2">
+                  <c:v>Claude Sonnet 4.6</c:v>
+                </c:pt>
+                <c:pt idx="3">
+                  <c:v>ClauseGuard</c:v>
+                </c:pt>
+              </c:strCache>
+            </c:strRef>
+          </c:cat>
+          <c:val>
+            <c:numRef>
+              <c:f>Sheet1!$C$2:$C$5</c:f>
+              <c:numCache>
+                <c:formatCode>General</c:formatCode>
+                <c:ptCount val="4"/>
+                <c:pt idx="0">
+                  <c:v>26.6</c:v>
+                </c:pt>
+                <c:pt idx="1">
+                  <c:v>6.7</c:v>
+                </c:pt>
+                <c:pt idx="2">
+                  <c:v>2.4</c:v>
+                </c:pt>
+                <c:pt idx="3">
+                  <c:v>1.4</c:v>
+                </c:pt>
+              </c:numCache>
+            </c:numRef>
+          </c:val>
+        </c:ser>
+        <c:dLbls>
+          <c:numFmt formatCode="0.0&quot;%&quot;" sourceLinked="0"/>
+          <c:txPr>
+            <a:bodyPr/>
+            <a:lstStyle/>
+            <a:p>
+              <a:pPr>
+                <a:defRPr sz="1100">
+                  <a:latin typeface="Calibri"/>
+                </a:defRPr>
+              </a:pPr>
+            </a:p>
+          </c:txPr>
+          <c:dLblPos val="outEnd"/>
+          <c:showLegendKey val="0"/>
+          <c:showVal val="1"/>
+          <c:showCatName val="0"/>
+          <c:showSerName val="0"/>
+          <c:showPercent val="0"/>
+          <c:showBubbleSize val="0"/>
+          <c:showLeaderLines val="1"/>
+        </c:dLbls>
+        <c:gapWidth val="60"/>
+        <c:axId val="-2068027336"/>
+        <c:axId val="-2113994440"/>
+      </c:barChart>
+      <c:catAx>
+        <c:axId val="-2068027336"/>
+        <c:scaling>
+          <c:orientation val="minMax"/>
+        </c:scaling>
+        <c:delete val="0"/>
+        <c:axPos val="b"/>
+        <c:majorTickMark val="out"/>
+        <c:minorTickMark val="none"/>
+        <c:tickLblPos val="nextTo"/>
+        <c:txPr>
+          <a:bodyPr/>
+          <a:lstStyle/>
+          <a:p>
+            <a:pPr>
+              <a:defRPr sz="1200">
+                <a:latin typeface="Calibri"/>
+              </a:defRPr>
+            </a:pPr>
+          </a:p>
+        </c:txPr>
+        <c:crossAx val="-2113994440"/>
+        <c:crosses val="autoZero"/>
+        <c:auto val="1"/>
+        <c:lblAlgn val="ctr"/>
+        <c:lblOffset val="100"/>
+        <c:noMultiLvlLbl val="0"/>
+      </c:catAx>
+      <c:valAx>
+        <c:axId val="-2113994440"/>
+        <c:scaling>
+          <c:max val="100.0"/>
+        </c:scaling>
+        <c:delete val="0"/>
+        <c:axPos val="l"/>
+        <c:majorTickMark val="out"/>
+        <c:minorTickMark val="none"/>
+        <c:tickLblPos val="nextTo"/>
+        <c:txPr>
+          <a:bodyPr/>
+          <a:lstStyle/>
+          <a:p>
+            <a:pPr>
+              <a:defRPr sz="1100"/>
+            </a:pPr>
+          </a:p>
+        </c:txPr>
+        <c:crossAx val="-2068027336"/>
+        <c:crosses val="autoZero"/>
+      </c:valAx>
+    </c:plotArea>
+    <c:legend>
+      <c:overlay val="0"/>
+      <c:txPr>
+        <a:bodyPr/>
+        <a:lstStyle/>
+        <a:p>
+          <a:pPr>
+            <a:defRPr sz="1200">
+              <a:latin typeface="Calibri"/>
+            </a:defRPr>
+          </a:pPr>
+        </a:p>
+      </c:txPr>
+    </c:legend>
+    <c:dispBlanksAs val="gap"/>
+  </c:chart>
+  <c:txPr>
+    <a:bodyPr/>
+    <a:lstStyle/>
+    <a:p>
+      <a:pPr>
+        <a:defRPr sz="1800"/>
+      </a:pPr>
+      <a:endParaRPr lang="en-US"/>
+    </a:p>
+  </c:txPr>
+  <c:externalData r:id="rId1">
+    <c:autoUpdate val="0"/>
+  </c:externalData>
+</c:chartSpace>
 </file>
 
 <file path=ppt/notesMasters/notesMaster1.xml><?xml version="1.0" encoding="utf-8"?>
@@ -511,77 +813,7 @@
           <a:lstStyle/>
           <a:p>
             <a:r>
-              <a:t>Good day. ClauseGuard is an entitlement engine for people who hold several insurance policies. It compiles each policy into typed clauses and runs four deterministic solvers over them: what you are owed, how the bill is split between your policies, what you can still do after a denial, and what to buy to close your gaps. Every answer cites the clause it used. The language model never decides; it only extracts, binds facts and words the reply. Over ten minutes we show the problem, the method, the security boundary and the results, including the ones that are not flattering.</a:t>
-            </a:r>
-          </a:p>
-        </p:txBody>
-      </p:sp>
-      <p:sp>
-        <p:nvSpPr>
-          <p:cNvPr id="4" name="Slide Number Placeholder 3"/>
-          <p:cNvSpPr>
-            <a:spLocks noGrp="1"/>
-          </p:cNvSpPr>
-          <p:nvPr>
-            <p:ph type="sldNum" idx="5" sz="quarter"/>
-          </p:nvPr>
-        </p:nvSpPr>
-        <p:spPr/>
-      </p:sp>
-    </p:spTree>
-  </p:cSld>
-  <p:clrMapOvr>
-    <a:masterClrMapping/>
-  </p:clrMapOvr>
-</p:notes>
-</file>
-
-<file path=ppt/notesSlides/notesSlide10.xml><?xml version="1.0" encoding="utf-8"?>
-<p:notes xmlns:a="http://schemas.openxmlformats.org/drawingml/2006/main" xmlns:p="http://schemas.openxmlformats.org/presentationml/2006/main" xmlns:r="http://schemas.openxmlformats.org/officeDocument/2006/relationships">
-  <p:cSld>
-    <p:spTree>
-      <p:nvGrpSpPr>
-        <p:cNvPr id="1" name=""/>
-        <p:cNvGrpSpPr/>
-        <p:nvPr/>
-      </p:nvGrpSpPr>
-      <p:grpSpPr>
-        <a:xfrm>
-          <a:off x="0" y="0"/>
-          <a:ext cx="0" cy="0"/>
-          <a:chOff x="0" y="0"/>
-          <a:chExt cx="0" cy="0"/>
-        </a:xfrm>
-      </p:grpSpPr>
-      <p:sp>
-        <p:nvSpPr>
-          <p:cNvPr id="2" name="Slide Image Placeholder 1"/>
-          <p:cNvSpPr>
-            <a:spLocks noGrp="1"/>
-          </p:cNvSpPr>
-          <p:nvPr>
-            <p:ph type="sldImg" idx="2"/>
-          </p:nvPr>
-        </p:nvSpPr>
-        <p:spPr/>
-      </p:sp>
-      <p:sp>
-        <p:nvSpPr>
-          <p:cNvPr id="3" name="Notes Placeholder 2"/>
-          <p:cNvSpPr>
-            <a:spLocks noGrp="1"/>
-          </p:cNvSpPr>
-          <p:nvPr>
-            <p:ph type="body" idx="3" sz="quarter"/>
-          </p:nvPr>
-        </p:nvSpPr>
-        <p:spPr/>
-        <p:txBody>
-          <a:bodyPr/>
-          <a:lstStyle/>
-          <a:p>
-            <a:r>
-              <a:t>What is real: the six insurer wordings, the CMS marketplace plans, the consumer questions, the ombudsman decisions and the Indonesian product summaries are public data downloaded with a reproducible script and a manifest of hashes. What is synthetic is stated as synthetic: the benchmark contracts, the personas and the statutory amounts. Next steps are the ombudsman replay for the adjudication twin, premiums in the plan experiment, an on-premise extraction model, an external red team and a labelled Indonesian set. Everything, including the limitations, is in the repository. Thank you.</a:t>
+              <a:t>ClauseGuard is an insurance assistant that reads your own policies, prepares your claim from your documents, sends it only after you confirm, and brings the insurer's decision back to you. Every answer points to the sentence of the policy that decides it.</a:t>
             </a:r>
           </a:p>
         </p:txBody>
@@ -651,7 +883,7 @@
           <a:lstStyle/>
           <a:p>
             <a:r>
-              <a:t>Insurance consumers in the United States, the United Kingdom, Singapore, China and Indonesia share one condition: coverage is split across several policies whose rules nobody reads. In the US, one in five in-network claims was denied in 2023 and under one percent appealed. In Indonesia, the regulator reports that more than half of complaints concern claim difficulty. The failures are arithmetic on the user's own documents: a deadline, a waiting period, the order of payers, cover paid twice. A chat model answers from memory. We want the answer computed from the policy and proved.</a:t>
+              <a:t>Most people never read their policies. When something happens they face several wordings, several document checklists and a filing deadline. Generic chat assistants answer confidently but make up exclusions. The problem is not understanding insurance in general; it is acting correctly on your own policies.</a:t>
             </a:r>
           </a:p>
         </p:txBody>
@@ -721,7 +953,7 @@
           <a:lstStyle/>
           <a:p>
             <a:r>
-              <a:t>Each policy is compiled once by a quarantined extractor into typed clause tuples. The relation is one of twelve values. The qualifiers are numbers with units, time windows, deadlines and conditions over a closed slot vocabulary. The verbatim clause travels with the tuple for citation only. Trust is a qualifier too, so the same filter that rejects an expired exclusion rejects an instruction smuggled through an upload. The user's situation is a set of typed facts. Four deterministic solvers read these objects. The model extracts, binds facts and phrases text. It never decides.</a:t>
+              <a:t>Rizky attaches four hospital documents and one sentence. The agent reads them, matches them to Sompo's document list, takes the bill from the invoice, and lays out Sompo's own claim form from Sompo's wording. Every field is filled from typed facts; the customer sees the form before anything leaves.</a:t>
             </a:r>
           </a:p>
         </p:txBody>
@@ -791,7 +1023,7 @@
           <a:lstStyle/>
           <a:p>
             <a:r>
-              <a:t>One slide, two halves. The agents read: a Document Reader turns a policy into typed rules, a Conversation Agent reads each message in context, a Fact Agent binds the facts, an Explainer words the answer in the customer's language, a Watchdog watches deadlines. Code decides: the solvers, the permission enforcer and the audit log. For a claim, the agent lays out the insurer's own form from that insurer's wording, fills it from typed facts, shows it before the Confirm tap and files the uploaded documents with it. On the other side a claims desk, behind its own token, reviews, decides with a note and can halt the agent; the decision flows back to the customer's chat.</a:t>
+              <a:t>The decision is not generated text. Policies are compiled into typed rules, and a deterministic engine applies them. The reply shows the amount, the filing deadline and the quoted clause. If a single missing fact would flip the result, the agent asks for that fact and nothing else.</a:t>
             </a:r>
           </a:p>
         </p:txBody>
@@ -861,7 +1093,7 @@
           <a:lstStyle/>
           <a:p>
             <a:r>
-              <a:t>The verdict solver runs a fixed order: find the covering clauses, apply the closed world so that no clause means not applicable rather than denied, then exclusions unless an exception holds, then waiting, grace, survival and contestability periods, then termination, otherwise covered with the payable. Here a thirty-day waiting period denies an admission on day twenty and the reply quotes the clause; on day forty-four the same policy pays two and a half million rupiah. When a fact is missing, the solver tries every value; it asks only if the verdict changes.</a:t>
+              <a:t>Submission needs a Confirm tap bound to a one-time server token. The claim, the form and the attachments land on the insurer's desk, a sandbox in this entry. A person reviews, decides with a note, and the decision appears in the customer's chat. The agent prepares and reports; it never decides a claim.</a:t>
             </a:r>
           </a:p>
         </p:txBody>
@@ -931,7 +1163,7 @@
           <a:lstStyle/>
           <a:p>
             <a:r>
-              <a:t>Three more solvers turn a verdict into an entitlement. The allocation optimizer splits one bill across the eligible policies under the jurisdiction's rule pack, presenting each payer what is still unpaid, and searches the claiming order exactly where deductibles or caps make order matter. Recourse searches for the smallest legitimate actions that turn a denial into cover: wait, provide a document, settle arrears, claim elsewhere. Facts about the event itself are immutable. The twin lists every denial ground a claims desk would raise. Plan selection is weighted set cover under a budget, solved as one mixed-integer programme.</a:t>
+              <a:t>Four permission tiers live in code, not in a prompt. Changing a payout account has no tool at all; the agent opens a ticket for a person. The insurer can halt the agent for every customer. Every step is written to a tamper-evident log. In our attack suite, none of 27 attacks had an effect.</a:t>
             </a:r>
           </a:p>
         </p:txBody>
@@ -1001,7 +1233,7 @@
           <a:lstStyle/>
           <a:p>
             <a:r>
-              <a:t>Security is enforced in code, not in the prompt. Reading and computing are free. Submitting needs a click in the interface and a one-time server nonce the model cannot produce. For money and identity the tool does not exist; the agent can only open a ticket for out-of-band verification. In our chat attack suite no attack had a forbidden effect and no benign request was blocked. With the enforcement function patched to allow everything, the kill-switch attack succeeds, which is why it is there. Hidden-text detection is heuristic and misses text rendered as an image.</a:t>
+              <a:t>On a public insurance-contract benchmark, ClauseGuard reaches 84.6 percent accuracy and invents a denial in 1.4 percent of cases. We do not claim to beat frontier models on accuracy; the difference is that answers are traced to clauses and denials are not fabricated. Scripted claims and the attack suite pass fully.</a:t>
             </a:r>
           </a:p>
         </p:txBody>
@@ -1071,77 +1303,7 @@
           <a:lstStyle/>
           <a:p>
             <a:r>
-              <a:t>Our numbers, with their limits. Scripted tasks pass thirty-three of thirty-three. Two off-script batches pass fully but are development sets; the blind batch, written and run once, passes three of fourteen, the honest generalisation figure for the rule layer. Clarification asks when it should in eighty-seven percent of cases and never asks when it should not. On the public benchmark, the old 82.9-vs-87.5 "parity" claim compared different item counts and has been corrected; held-out accuracy is 84.1% both before and after the extraction fixes, and the baseline comparison on clean held-out data could not be completed this cycle. The CMS plan experiment is honest too: every marketplace plan covers the same perils, so the optimiser and the baselines pick the same plan.</a:t>
-            </a:r>
-          </a:p>
-        </p:txBody>
-      </p:sp>
-      <p:sp>
-        <p:nvSpPr>
-          <p:cNvPr id="4" name="Slide Number Placeholder 3"/>
-          <p:cNvSpPr>
-            <a:spLocks noGrp="1"/>
-          </p:cNvSpPr>
-          <p:nvPr>
-            <p:ph type="sldNum" idx="5" sz="quarter"/>
-          </p:nvPr>
-        </p:nvSpPr>
-        <p:spPr/>
-      </p:sp>
-    </p:spTree>
-  </p:cSld>
-  <p:clrMapOvr>
-    <a:masterClrMapping/>
-  </p:clrMapOvr>
-</p:notes>
-</file>
-
-<file path=ppt/notesSlides/notesSlide9.xml><?xml version="1.0" encoding="utf-8"?>
-<p:notes xmlns:a="http://schemas.openxmlformats.org/drawingml/2006/main" xmlns:p="http://schemas.openxmlformats.org/presentationml/2006/main" xmlns:r="http://schemas.openxmlformats.org/officeDocument/2006/relationships">
-  <p:cSld>
-    <p:spTree>
-      <p:nvGrpSpPr>
-        <p:cNvPr id="1" name=""/>
-        <p:cNvGrpSpPr/>
-        <p:nvPr/>
-      </p:nvGrpSpPr>
-      <p:grpSpPr>
-        <a:xfrm>
-          <a:off x="0" y="0"/>
-          <a:ext cx="0" cy="0"/>
-          <a:chOff x="0" y="0"/>
-          <a:chExt cx="0" cy="0"/>
-        </a:xfrm>
-      </p:grpSpPr>
-      <p:sp>
-        <p:nvSpPr>
-          <p:cNvPr id="2" name="Slide Image Placeholder 1"/>
-          <p:cNvSpPr>
-            <a:spLocks noGrp="1"/>
-          </p:cNvSpPr>
-          <p:nvPr>
-            <p:ph type="sldImg" idx="2"/>
-          </p:nvPr>
-        </p:nvSpPr>
-        <p:spPr/>
-      </p:sp>
-      <p:sp>
-        <p:nvSpPr>
-          <p:cNvPr id="3" name="Notes Placeholder 2"/>
-          <p:cNvSpPr>
-            <a:spLocks noGrp="1"/>
-          </p:cNvSpPr>
-          <p:nvPr>
-            <p:ph type="body" idx="3" sz="quarter"/>
-          </p:nvPr>
-        </p:nvSpPr>
-        <p:spPr/>
-        <p:txBody>
-          <a:bodyPr/>
-          <a:lstStyle/>
-          <a:p>
-            <a:r>
-              <a:t>One story end to end. A student with dengue asks what he gets; the answer is the amount, the deadline and the sentence of the policy that decides it, with one question about the hospital. He attaches four hospital documents in one go; the assistant reads them, ticks the insurer's own document list, takes the bill from the invoice and shows Sompo's claim form, which he can download. He taps Confirm, the claim lands on the insurer's desk with the attachments, a person approves it with a note, and the decision appears in his chat. Then a delivery rider with four policies, the what-if panel, and an attack that ends in a ticket.</a:t>
+              <a:t>What is real is public data and a working product. What is simulated is the insurer: our desk is a sandbox, so no real claim is filed. The next steps are an insurer API, persistent sessions and an external red team. The code, tests, evidence and limitations are all in the repository. Thank you.</a:t>
             </a:r>
           </a:p>
         </p:txBody>
@@ -4156,18 +4318,17 @@
         <p:spPr>
           <a:xfrm>
             <a:off x="0" y="0"/>
-            <a:ext cx="457200" cy="6858000"/>
+            <a:ext cx="12191695" cy="6858000"/>
           </a:xfrm>
           <a:prstGeom prst="rect">
             <a:avLst/>
           </a:prstGeom>
           <a:solidFill>
-            <a:srgbClr val="0B6E6E"/>
+            <a:srgbClr val="14213D"/>
           </a:solidFill>
           <a:ln>
             <a:noFill/>
           </a:ln>
-          <a:effectLst/>
         </p:spPr>
         <p:style>
           <a:lnRef idx="1">
@@ -4193,164 +4354,26 @@
       </p:sp>
       <p:sp>
         <p:nvSpPr>
-          <p:cNvPr id="3" name="TextBox 2"/>
-          <p:cNvSpPr txBox="1"/>
-          <p:nvPr/>
-        </p:nvSpPr>
-        <p:spPr>
-          <a:xfrm>
-            <a:off x="1097280" y="1828800"/>
-            <a:ext cx="10058400" cy="1280160"/>
-          </a:xfrm>
-          <a:prstGeom prst="rect">
-            <a:avLst/>
-          </a:prstGeom>
-          <a:noFill/>
-        </p:spPr>
-        <p:txBody>
-          <a:bodyPr wrap="none">
-            <a:spAutoFit/>
-          </a:bodyPr>
-          <a:lstStyle/>
-          <a:p>
-            <a:r>
-              <a:rPr sz="5400" b="1">
-                <a:solidFill>
-                  <a:srgbClr val="0B6E6E"/>
-                </a:solidFill>
-                <a:latin typeface="Calibri"/>
-              </a:rPr>
-              <a:t>ClauseGuard</a:t>
-            </a:r>
-          </a:p>
-        </p:txBody>
-      </p:sp>
-      <p:sp>
-        <p:nvSpPr>
-          <p:cNvPr id="4" name="TextBox 3"/>
-          <p:cNvSpPr txBox="1"/>
-          <p:nvPr/>
-        </p:nvSpPr>
-        <p:spPr>
-          <a:xfrm>
-            <a:off x="1097280" y="3017520"/>
-            <a:ext cx="10058400" cy="3200400"/>
-          </a:xfrm>
-          <a:prstGeom prst="rect">
-            <a:avLst/>
-          </a:prstGeom>
-          <a:noFill/>
-        </p:spPr>
-        <p:txBody>
-          <a:bodyPr wrap="square">
-            <a:spAutoFit/>
-          </a:bodyPr>
-          <a:lstStyle/>
-          <a:p>
-            <a:pPr>
-              <a:spcAft>
-                <a:spcPts val="1000"/>
-              </a:spcAft>
-            </a:pPr>
-            <a:r>
-              <a:rPr sz="2600" b="1">
-                <a:solidFill>
-                  <a:srgbClr val="1F2933"/>
-                </a:solidFill>
-                <a:latin typeface="Calibri"/>
-              </a:rPr>
-              <a:t>A Multi-Policy Entitlement Engine for Insurance Consumers</a:t>
-            </a:r>
-          </a:p>
-          <a:p>
-            <a:pPr>
-              <a:spcAft>
-                <a:spcPts val="1000"/>
-              </a:spcAft>
-            </a:pPr>
-            <a:r>
-              <a:rPr sz="2000" b="0">
-                <a:solidFill>
-                  <a:srgbClr val="5B6772"/>
-                </a:solidFill>
-                <a:latin typeface="Calibri"/>
-              </a:rPr>
-              <a:t>Compiles real policies into a constraint program; computes what you are owed, how to get it, and what to buy</a:t>
-            </a:r>
-          </a:p>
-          <a:p>
-            <a:pPr>
-              <a:spcAft>
-                <a:spcPts val="1000"/>
-              </a:spcAft>
-            </a:pPr>
-            <a:r>
-              <a:rPr sz="2000" b="0">
-                <a:solidFill>
-                  <a:srgbClr val="5B6772"/>
-                </a:solidFill>
-                <a:latin typeface="Calibri"/>
-              </a:rPr>
-              <a:t>Proves every answer with clauses; acts only within safe permission tiers</a:t>
-            </a:r>
-          </a:p>
-          <a:p>
-            <a:pPr>
-              <a:spcAft>
-                <a:spcPts val="1000"/>
-              </a:spcAft>
-            </a:pPr>
-            <a:r>
-              <a:rPr sz="2000" b="0">
-                <a:solidFill>
-                  <a:srgbClr val="5B6772"/>
-                </a:solidFill>
-                <a:latin typeface="Calibri"/>
-              </a:rPr>
-              <a:t>FinTechathon 2026 | International Track | Topic D | Team ClauseGuard</a:t>
-            </a:r>
-          </a:p>
-        </p:txBody>
-      </p:sp>
-    </p:spTree>
-  </p:cSld>
-  <p:clrMapOvr>
-    <a:masterClrMapping/>
-  </p:clrMapOvr>
-</p:sld>
-</file>
-
-<file path=ppt/slides/slide10.xml><?xml version="1.0" encoding="utf-8"?>
-<p:sld xmlns:a="http://schemas.openxmlformats.org/drawingml/2006/main" xmlns:p="http://schemas.openxmlformats.org/presentationml/2006/main" xmlns:r="http://schemas.openxmlformats.org/officeDocument/2006/relationships">
-  <p:cSld>
-    <p:spTree>
-      <p:nvGrpSpPr>
-        <p:cNvPr id="1" name=""/>
-        <p:cNvGrpSpPr/>
-        <p:nvPr/>
-      </p:nvGrpSpPr>
-      <p:grpSpPr/>
-      <p:sp>
-        <p:nvSpPr>
-          <p:cNvPr id="2" name="Rectangle 1"/>
+          <p:cNvPr id="3" name="Rounded Rectangle 2"/>
           <p:cNvSpPr/>
           <p:nvPr/>
         </p:nvSpPr>
         <p:spPr>
           <a:xfrm>
-            <a:off x="0" y="0"/>
-            <a:ext cx="228600" cy="6858000"/>
-          </a:xfrm>
-          <a:prstGeom prst="rect">
-            <a:avLst/>
+            <a:off x="3566160" y="1097280"/>
+            <a:ext cx="5029200" cy="2011680"/>
+          </a:xfrm>
+          <a:prstGeom prst="roundRect">
+            <a:avLst>
+              <a:gd name="adj" fmla="val 8000"/>
+            </a:avLst>
           </a:prstGeom>
           <a:solidFill>
-            <a:srgbClr val="0B6E6E"/>
+            <a:srgbClr val="FFFFFF"/>
           </a:solidFill>
           <a:ln>
             <a:noFill/>
           </a:ln>
-          <a:effectLst/>
         </p:spPr>
         <p:style>
           <a:lnRef idx="1">
@@ -4374,16 +4397,40 @@
           </a:p>
         </p:txBody>
       </p:sp>
-      <p:sp>
-        <p:nvSpPr>
-          <p:cNvPr id="3" name="TextBox 2"/>
+      <p:pic>
+        <p:nvPicPr>
+          <p:cNvPr id="4" name="Picture 3" descr="logo-wordmark.png"/>
+          <p:cNvPicPr>
+            <a:picLocks noChangeAspect="1"/>
+          </p:cNvPicPr>
+          <p:nvPr/>
+        </p:nvPicPr>
+        <p:blipFill>
+          <a:blip r:embed="rId2"/>
+          <a:stretch>
+            <a:fillRect/>
+          </a:stretch>
+        </p:blipFill>
+        <p:spPr>
+          <a:xfrm>
+            <a:off x="3749039" y="1574276"/>
+            <a:ext cx="4663440" cy="1057687"/>
+          </a:xfrm>
+          <a:prstGeom prst="rect">
+            <a:avLst/>
+          </a:prstGeom>
+        </p:spPr>
+      </p:pic>
+      <p:sp>
+        <p:nvSpPr>
+          <p:cNvPr id="5" name="TextBox 4"/>
           <p:cNvSpPr txBox="1"/>
           <p:nvPr/>
         </p:nvSpPr>
         <p:spPr>
           <a:xfrm>
-            <a:off x="640080" y="365760"/>
-            <a:ext cx="10972800" cy="914400"/>
+            <a:off x="640080" y="3474720"/>
+            <a:ext cx="10911535" cy="1097280"/>
           </a:xfrm>
           <a:prstGeom prst="rect">
             <a:avLst/>
@@ -4396,28 +4443,29 @@
           </a:bodyPr>
           <a:lstStyle/>
           <a:p>
-            <a:r>
-              <a:rPr sz="3600" b="1">
+            <a:pPr algn="ctr"/>
+            <a:r>
+              <a:rPr sz="3000" b="1">
                 <a:solidFill>
-                  <a:srgbClr val="0B6E6E"/>
+                  <a:srgbClr val="FFFFFF"/>
                 </a:solidFill>
                 <a:latin typeface="Calibri"/>
               </a:rPr>
-              <a:t>What is real and what is next</a:t>
-            </a:r>
-          </a:p>
-        </p:txBody>
-      </p:sp>
-      <p:sp>
-        <p:nvSpPr>
-          <p:cNvPr id="4" name="TextBox 3"/>
+              <a:t>Clarity in every clause, confidence in every claim.</a:t>
+            </a:r>
+          </a:p>
+        </p:txBody>
+      </p:sp>
+      <p:sp>
+        <p:nvSpPr>
+          <p:cNvPr id="6" name="TextBox 5"/>
           <p:cNvSpPr txBox="1"/>
           <p:nvPr/>
         </p:nvSpPr>
         <p:spPr>
           <a:xfrm>
-            <a:off x="640080" y="1371600"/>
-            <a:ext cx="10972800" cy="5029200"/>
+            <a:off x="640080" y="4846320"/>
+            <a:ext cx="10911535" cy="457200"/>
           </a:xfrm>
           <a:prstGeom prst="rect">
             <a:avLst/>
@@ -4430,142 +4478,29 @@
           </a:bodyPr>
           <a:lstStyle/>
           <a:p>
-            <a:pPr>
-              <a:spcAft>
-                <a:spcPts val="1200"/>
-              </a:spcAft>
-            </a:pPr>
-            <a:r>
-              <a:rPr sz="1300" b="1">
+            <a:pPr algn="ctr"/>
+            <a:r>
+              <a:rPr sz="1600" b="0">
                 <a:solidFill>
-                  <a:srgbClr val="0B6E6E"/>
+                  <a:srgbClr val="C7D2FE"/>
                 </a:solidFill>
                 <a:latin typeface="Calibri"/>
               </a:rPr>
-              <a:t>■  </a:t>
-            </a:r>
-            <a:r>
-              <a:rPr sz="1900" b="0">
-                <a:solidFill>
-                  <a:srgbClr val="1F2933"/>
-                </a:solidFill>
-                <a:latin typeface="Calibri"/>
-              </a:rPr>
-              <a:t>Real inputs today: six public insurer wordings, CMS PUF plan year 2026 (834 Texas plans), InsuranceQA questions, UK ombudsman decisions, RIPLAY summaries</a:t>
-            </a:r>
-          </a:p>
-          <a:p>
-            <a:pPr>
-              <a:spcAft>
-                <a:spcPts val="1200"/>
-              </a:spcAft>
-            </a:pPr>
-            <a:r>
-              <a:rPr sz="1300" b="1">
-                <a:solidFill>
-                  <a:srgbClr val="0B6E6E"/>
-                </a:solidFill>
-                <a:latin typeface="Calibri"/>
-              </a:rPr>
-              <a:t>■  </a:t>
-            </a:r>
-            <a:r>
-              <a:rPr sz="1900" b="0">
-                <a:solidFill>
-                  <a:srgbClr val="1F2933"/>
-                </a:solidFill>
-                <a:latin typeface="Calibri"/>
-              </a:rPr>
-              <a:t>Synthetic, stated as such: benchmark contracts (expert-reviewed), personas, mock group plans, statutory amounts</a:t>
-            </a:r>
-          </a:p>
-          <a:p>
-            <a:pPr>
-              <a:spcAft>
-                <a:spcPts val="1200"/>
-              </a:spcAft>
-            </a:pPr>
-            <a:r>
-              <a:rPr sz="1300" b="1">
-                <a:solidFill>
-                  <a:srgbClr val="0B6E6E"/>
-                </a:solidFill>
-                <a:latin typeface="Calibri"/>
-              </a:rPr>
-              <a:t>■  </a:t>
-            </a:r>
-            <a:r>
-              <a:rPr sz="1900" b="0">
-                <a:solidFill>
-                  <a:srgbClr val="1F2933"/>
-                </a:solidFill>
-                <a:latin typeface="Calibri"/>
-              </a:rPr>
-              <a:t>Next: ombudsman replay for the twin, premiums in the CMS experiment, on-premise extraction, external red team, Indonesian labelled set</a:t>
-            </a:r>
-          </a:p>
-          <a:p>
-            <a:pPr>
-              <a:spcAft>
-                <a:spcPts val="1200"/>
-              </a:spcAft>
-            </a:pPr>
-            <a:r>
-              <a:rPr sz="1300" b="1">
-                <a:solidFill>
-                  <a:srgbClr val="0B6E6E"/>
-                </a:solidFill>
-                <a:latin typeface="Calibri"/>
-              </a:rPr>
-              <a:t>■  </a:t>
-            </a:r>
-            <a:r>
-              <a:rPr sz="1900" b="0">
-                <a:solidFill>
-                  <a:srgbClr val="1F2933"/>
-                </a:solidFill>
-                <a:latin typeface="Calibri"/>
-              </a:rPr>
-              <a:t>Not built: anchoring the audit chain outside the host; integration with a real insurer's API (the desk is a sandbox)</a:t>
-            </a:r>
-          </a:p>
-          <a:p>
-            <a:pPr>
-              <a:spcAft>
-                <a:spcPts val="1200"/>
-              </a:spcAft>
-            </a:pPr>
-            <a:r>
-              <a:rPr sz="1300" b="1">
-                <a:solidFill>
-                  <a:srgbClr val="0B6E6E"/>
-                </a:solidFill>
-                <a:latin typeface="Calibri"/>
-              </a:rPr>
-              <a:t>■  </a:t>
-            </a:r>
-            <a:r>
-              <a:rPr sz="1900" b="0">
-                <a:solidFill>
-                  <a:srgbClr val="1F2933"/>
-                </a:solidFill>
-                <a:latin typeface="Calibri"/>
-              </a:rPr>
-              <a:t>Running: web client on Vercel, Postgres audit chain on Supabase, backend as a Docker image; code, tests, evidence and limitations in the repository</a:t>
-            </a:r>
-          </a:p>
-        </p:txBody>
-      </p:sp>
-      <p:sp>
-        <p:nvSpPr>
-          <p:cNvPr id="5" name="TextBox 4"/>
+              <a:t>Bunga Laelatul Muna · Izra · Wan Sabrina — Institut Teknologi Sepuluh Nopember, Indonesia</a:t>
+            </a:r>
+          </a:p>
+        </p:txBody>
+      </p:sp>
+      <p:sp>
+        <p:nvSpPr>
+          <p:cNvPr id="7" name="TextBox 6"/>
           <p:cNvSpPr txBox="1"/>
           <p:nvPr/>
         </p:nvSpPr>
         <p:spPr>
           <a:xfrm>
-            <a:off x="640080" y="6400800"/>
-            <a:ext cx="10972800" cy="320040"/>
+            <a:off x="640080" y="5257800"/>
+            <a:ext cx="10911535" cy="457200"/>
           </a:xfrm>
           <a:prstGeom prst="rect">
             <a:avLst/>
@@ -4573,19 +4508,20 @@
           <a:noFill/>
         </p:spPr>
         <p:txBody>
-          <a:bodyPr wrap="none">
+          <a:bodyPr wrap="square">
             <a:spAutoFit/>
           </a:bodyPr>
           <a:lstStyle/>
           <a:p>
-            <a:r>
-              <a:rPr sz="1100" b="0">
+            <a:pPr algn="ctr"/>
+            <a:r>
+              <a:rPr sz="1600" b="0">
                 <a:solidFill>
-                  <a:srgbClr val="5B6772"/>
+                  <a:srgbClr val="C7D2FE"/>
                 </a:solidFill>
                 <a:latin typeface="Calibri"/>
               </a:rPr>
-              <a:t>ClauseGuard  |  FinTechathon 2026, Topic D  |  10/10</a:t>
+              <a:t>FinTechathon 2026 · International Track · Topic D</a:t>
             </a:r>
           </a:p>
         </p:txBody>
@@ -4617,18 +4553,17 @@
         <p:spPr>
           <a:xfrm>
             <a:off x="0" y="0"/>
-            <a:ext cx="228600" cy="6858000"/>
+            <a:ext cx="164592" cy="6858000"/>
           </a:xfrm>
           <a:prstGeom prst="rect">
             <a:avLst/>
           </a:prstGeom>
           <a:solidFill>
-            <a:srgbClr val="0B6E6E"/>
+            <a:srgbClr val="1E40AF"/>
           </a:solidFill>
           <a:ln>
             <a:noFill/>
           </a:ln>
-          <a:effectLst/>
         </p:spPr>
         <p:style>
           <a:lnRef idx="1">
@@ -4660,8 +4595,8 @@
         </p:nvSpPr>
         <p:spPr>
           <a:xfrm>
-            <a:off x="640080" y="365760"/>
-            <a:ext cx="10972800" cy="914400"/>
+            <a:off x="640080" y="411480"/>
+            <a:ext cx="10911535" cy="548640"/>
           </a:xfrm>
           <a:prstGeom prst="rect">
             <a:avLst/>
@@ -4674,14 +4609,15 @@
           </a:bodyPr>
           <a:lstStyle/>
           <a:p>
-            <a:r>
-              <a:rPr sz="3600" b="1">
+            <a:pPr algn="l"/>
+            <a:r>
+              <a:rPr sz="1300" b="1">
                 <a:solidFill>
-                  <a:srgbClr val="0B6E6E"/>
+                  <a:srgbClr val="1E40AF"/>
                 </a:solidFill>
                 <a:latin typeface="Calibri"/>
               </a:rPr>
-              <a:t>Coverage is fragmented everywhere</a:t>
+              <a:t>THE PROBLEM</a:t>
             </a:r>
           </a:p>
         </p:txBody>
@@ -4694,8 +4630,8 @@
         </p:nvSpPr>
         <p:spPr>
           <a:xfrm>
-            <a:off x="640080" y="1371600"/>
-            <a:ext cx="10972800" cy="5029200"/>
+            <a:off x="640080" y="868680"/>
+            <a:ext cx="10911535" cy="1097280"/>
           </a:xfrm>
           <a:prstGeom prst="rect">
             <a:avLst/>
@@ -4708,142 +4644,100 @@
           </a:bodyPr>
           <a:lstStyle/>
           <a:p>
-            <a:pPr>
-              <a:spcAft>
-                <a:spcPts val="1200"/>
-              </a:spcAft>
-            </a:pPr>
-            <a:r>
-              <a:rPr sz="1300" b="1">
+            <a:pPr algn="l"/>
+            <a:r>
+              <a:rPr sz="2800" b="1">
                 <a:solidFill>
-                  <a:srgbClr val="0B6E6E"/>
+                  <a:srgbClr val="14213D"/>
                 </a:solidFill>
                 <a:latin typeface="Calibri"/>
               </a:rPr>
-              <a:t>■  </a:t>
-            </a:r>
-            <a:r>
-              <a:rPr sz="1900" b="0">
+              <a:t>Claims fail on paperwork and deadlines, not on coverage.</a:t>
+            </a:r>
+          </a:p>
+        </p:txBody>
+      </p:sp>
+      <p:sp>
+        <p:nvSpPr>
+          <p:cNvPr id="5" name="TextBox 4"/>
+          <p:cNvSpPr txBox="1"/>
+          <p:nvPr/>
+        </p:nvSpPr>
+        <p:spPr>
+          <a:xfrm>
+            <a:off x="640080" y="2331720"/>
+            <a:ext cx="10911535" cy="1371600"/>
+          </a:xfrm>
+          <a:prstGeom prst="rect">
+            <a:avLst/>
+          </a:prstGeom>
+          <a:noFill/>
+        </p:spPr>
+        <p:txBody>
+          <a:bodyPr wrap="square">
+            <a:spAutoFit/>
+          </a:bodyPr>
+          <a:lstStyle/>
+          <a:p>
+            <a:pPr>
+              <a:spcAft>
+                <a:spcPts val="800"/>
+              </a:spcAft>
+            </a:pPr>
+            <a:r>
+              <a:rPr sz="2000">
                 <a:solidFill>
                   <a:srgbClr val="1F2933"/>
                 </a:solidFill>
                 <a:latin typeface="Calibri"/>
               </a:rPr>
-              <a:t>US: 19% of in-network marketplace claims denied in 2023; under 1% appealed (KFF, 2025)</a:t>
+              <a:t>•  A household holds three to five policies, each a 40-page wording with its own document list and filing clock</a:t>
             </a:r>
           </a:p>
           <a:p>
             <a:pPr>
               <a:spcAft>
-                <a:spcPts val="1200"/>
+                <a:spcPts val="800"/>
               </a:spcAft>
             </a:pPr>
             <a:r>
-              <a:rPr sz="1300" b="1">
-                <a:solidFill>
-                  <a:srgbClr val="0B6E6E"/>
-                </a:solidFill>
-                <a:latin typeface="Calibri"/>
-              </a:rPr>
-              <a:t>■  </a:t>
-            </a:r>
-            <a:r>
-              <a:rPr sz="1900" b="0">
+              <a:rPr sz="2000">
                 <a:solidFill>
                   <a:srgbClr val="1F2933"/>
                 </a:solidFill>
                 <a:latin typeface="Calibri"/>
               </a:rPr>
-              <a:t>Indonesia: more than half of insurance complaints concern claim difficulty (OJK, 2023); 53% of consumer claims rejected (YLKI, 2025)</a:t>
+              <a:t>•  People do not know which policy pays first, how much, or what to send by when</a:t>
             </a:r>
           </a:p>
           <a:p>
             <a:pPr>
               <a:spcAft>
-                <a:spcPts val="1200"/>
+                <a:spcPts val="800"/>
               </a:spcAft>
             </a:pPr>
             <a:r>
-              <a:rPr sz="1300" b="1">
-                <a:solidFill>
-                  <a:srgbClr val="0B6E6E"/>
-                </a:solidFill>
-                <a:latin typeface="Calibri"/>
-              </a:rPr>
-              <a:t>■  </a:t>
-            </a:r>
-            <a:r>
-              <a:rPr sz="1900" b="0">
+              <a:rPr sz="2000">
                 <a:solidFill>
                   <a:srgbClr val="1F2933"/>
                 </a:solidFill>
                 <a:latin typeface="Calibri"/>
               </a:rPr>
-              <a:t>Hong Kong: about 30% of settled complaints are non-disclosure; China: payout-rate lawsuits over strict definitions</a:t>
-            </a:r>
-          </a:p>
-          <a:p>
-            <a:pPr>
-              <a:spcAft>
-                <a:spcPts val="1200"/>
-              </a:spcAft>
-            </a:pPr>
-            <a:r>
-              <a:rPr sz="1300" b="1">
-                <a:solidFill>
-                  <a:srgbClr val="0B6E6E"/>
-                </a:solidFill>
-                <a:latin typeface="Calibri"/>
-              </a:rPr>
-              <a:t>■  </a:t>
-            </a:r>
-            <a:r>
-              <a:rPr sz="1900" b="0">
-                <a:solidFill>
-                  <a:srgbClr val="1F2933"/>
-                </a:solidFill>
-                <a:latin typeface="Calibri"/>
-              </a:rPr>
-              <a:t>A household holds a statutory scheme, a group plan, an individual plan, a rider: who pays first, and how much?</a:t>
-            </a:r>
-          </a:p>
-          <a:p>
-            <a:pPr>
-              <a:spcAft>
-                <a:spcPts val="1200"/>
-              </a:spcAft>
-            </a:pPr>
-            <a:r>
-              <a:rPr sz="1300" b="1">
-                <a:solidFill>
-                  <a:srgbClr val="0B6E6E"/>
-                </a:solidFill>
-                <a:latin typeface="Calibri"/>
-              </a:rPr>
-              <a:t>■  </a:t>
-            </a:r>
-            <a:r>
-              <a:rPr sz="1900" b="0">
-                <a:solidFill>
-                  <a:srgbClr val="1F2933"/>
-                </a:solidFill>
-                <a:latin typeface="Calibri"/>
-              </a:rPr>
-              <a:t>Five rule failures: late filing, waiting period, wrong payer order, double cover, lapse</a:t>
-            </a:r>
-          </a:p>
-        </p:txBody>
-      </p:sp>
-      <p:sp>
-        <p:nvSpPr>
-          <p:cNvPr id="5" name="TextBox 4"/>
+              <a:t>•  Chatbots answer fluently — and invent denials that are not in the policy</a:t>
+            </a:r>
+          </a:p>
+        </p:txBody>
+      </p:sp>
+      <p:sp>
+        <p:nvSpPr>
+          <p:cNvPr id="6" name="TextBox 5"/>
           <p:cNvSpPr txBox="1"/>
           <p:nvPr/>
         </p:nvSpPr>
         <p:spPr>
           <a:xfrm>
-            <a:off x="640080" y="6400800"/>
-            <a:ext cx="10972800" cy="320040"/>
+            <a:off x="11094415" y="6400800"/>
+            <a:ext cx="548640" cy="274320"/>
           </a:xfrm>
           <a:prstGeom prst="rect">
             <a:avLst/>
@@ -4851,19 +4745,20 @@
           <a:noFill/>
         </p:spPr>
         <p:txBody>
-          <a:bodyPr wrap="none">
+          <a:bodyPr wrap="square">
             <a:spAutoFit/>
           </a:bodyPr>
           <a:lstStyle/>
           <a:p>
-            <a:r>
-              <a:rPr sz="1100" b="0">
+            <a:pPr algn="r"/>
+            <a:r>
+              <a:rPr sz="1000" b="0">
                 <a:solidFill>
                   <a:srgbClr val="5B6772"/>
                 </a:solidFill>
                 <a:latin typeface="Calibri"/>
               </a:rPr>
-              <a:t>ClauseGuard  |  FinTechathon 2026, Topic D  |  2/10</a:t>
+              <a:t>2/8</a:t>
             </a:r>
           </a:p>
         </p:txBody>
@@ -4895,18 +4790,17 @@
         <p:spPr>
           <a:xfrm>
             <a:off x="0" y="0"/>
-            <a:ext cx="228600" cy="6858000"/>
+            <a:ext cx="164592" cy="6858000"/>
           </a:xfrm>
           <a:prstGeom prst="rect">
             <a:avLst/>
           </a:prstGeom>
           <a:solidFill>
-            <a:srgbClr val="0B6E6E"/>
+            <a:srgbClr val="1E40AF"/>
           </a:solidFill>
           <a:ln>
             <a:noFill/>
           </a:ln>
-          <a:effectLst/>
         </p:spPr>
         <p:style>
           <a:lnRef idx="1">
@@ -4938,8 +4832,8 @@
         </p:nvSpPr>
         <p:spPr>
           <a:xfrm>
-            <a:off x="640080" y="365760"/>
-            <a:ext cx="10972800" cy="914400"/>
+            <a:off x="640080" y="411480"/>
+            <a:ext cx="10911535" cy="548640"/>
           </a:xfrm>
           <a:prstGeom prst="rect">
             <a:avLst/>
@@ -4952,14 +4846,15 @@
           </a:bodyPr>
           <a:lstStyle/>
           <a:p>
-            <a:r>
-              <a:rPr sz="3600" b="1">
+            <a:pPr algn="l"/>
+            <a:r>
+              <a:rPr sz="1300" b="1">
                 <a:solidFill>
-                  <a:srgbClr val="0B6E6E"/>
+                  <a:srgbClr val="1E40AF"/>
                 </a:solidFill>
                 <a:latin typeface="Calibri"/>
               </a:rPr>
-              <a:t>Insurance as a constraint program</a:t>
+              <a:t>FOUR DOCUMENTS, ONE SENTENCE, CLAIM READY</a:t>
             </a:r>
           </a:p>
         </p:txBody>
@@ -4972,8 +4867,8 @@
         </p:nvSpPr>
         <p:spPr>
           <a:xfrm>
-            <a:off x="640080" y="1371600"/>
-            <a:ext cx="10972800" cy="5029200"/>
+            <a:off x="640080" y="868680"/>
+            <a:ext cx="10911535" cy="1097280"/>
           </a:xfrm>
           <a:prstGeom prst="rect">
             <a:avLst/>
@@ -4986,142 +4881,99 @@
           </a:bodyPr>
           <a:lstStyle/>
           <a:p>
-            <a:pPr>
-              <a:spcAft>
-                <a:spcPts val="1200"/>
-              </a:spcAft>
-            </a:pPr>
-            <a:r>
-              <a:rPr sz="1300" b="1">
+            <a:pPr algn="l"/>
+            <a:r>
+              <a:rPr sz="2800" b="1">
                 <a:solidFill>
-                  <a:srgbClr val="0B6E6E"/>
+                  <a:srgbClr val="14213D"/>
                 </a:solidFill>
                 <a:latin typeface="Calibri"/>
               </a:rPr>
-              <a:t>■  </a:t>
-            </a:r>
-            <a:r>
-              <a:rPr sz="1900" b="0">
-                <a:solidFill>
-                  <a:srgbClr val="1F2933"/>
-                </a:solidFill>
-                <a:latin typeface="Calibri"/>
-              </a:rPr>
-              <a:t>Quarantined extractor compiles each policy into typed clause tuples: relation, qualifiers, verbatim evidence, trust tier</a:t>
-            </a:r>
-          </a:p>
-          <a:p>
-            <a:pPr>
-              <a:spcAft>
-                <a:spcPts val="1200"/>
-              </a:spcAft>
-            </a:pPr>
-            <a:r>
-              <a:rPr sz="1300" b="1">
-                <a:solidFill>
-                  <a:srgbClr val="0B6E6E"/>
-                </a:solidFill>
-                <a:latin typeface="Calibri"/>
-              </a:rPr>
-              <a:t>■  </a:t>
-            </a:r>
-            <a:r>
-              <a:rPr sz="1900" b="0">
-                <a:solidFill>
-                  <a:srgbClr val="1F2933"/>
-                </a:solidFill>
-                <a:latin typeface="Calibri"/>
-              </a:rPr>
-              <a:t>Qualifiers are data, not prose: limits, deductibles, windows, deadlines, applies-if conditions, basis</a:t>
-            </a:r>
-          </a:p>
-          <a:p>
-            <a:pPr>
-              <a:spcAft>
-                <a:spcPts val="1200"/>
-              </a:spcAft>
-            </a:pPr>
-            <a:r>
-              <a:rPr sz="1300" b="1">
-                <a:solidFill>
-                  <a:srgbClr val="0B6E6E"/>
-                </a:solidFill>
-                <a:latin typeface="Calibri"/>
-              </a:rPr>
-              <a:t>■  </a:t>
-            </a:r>
-            <a:r>
-              <a:rPr sz="1900" b="0">
-                <a:solidFill>
-                  <a:srgbClr val="1F2933"/>
-                </a:solidFill>
-                <a:latin typeface="Calibri"/>
-              </a:rPr>
-              <a:t>A situation is a closed set of fact slots; an unbound slot is absent, never false</a:t>
-            </a:r>
-          </a:p>
-          <a:p>
-            <a:pPr>
-              <a:spcAft>
-                <a:spcPts val="1200"/>
-              </a:spcAft>
-            </a:pPr>
-            <a:r>
-              <a:rPr sz="1300" b="1">
-                <a:solidFill>
-                  <a:srgbClr val="0B6E6E"/>
-                </a:solidFill>
-                <a:latin typeface="Calibri"/>
-              </a:rPr>
-              <a:t>■  </a:t>
-            </a:r>
-            <a:r>
-              <a:rPr sz="1900" b="0">
-                <a:solidFill>
-                  <a:srgbClr val="1F2933"/>
-                </a:solidFill>
-                <a:latin typeface="Calibri"/>
-              </a:rPr>
-              <a:t>Four solvers read the store; no model runs inside any of them</a:t>
-            </a:r>
-          </a:p>
-          <a:p>
-            <a:pPr>
-              <a:spcAft>
-                <a:spcPts val="1200"/>
-              </a:spcAft>
-            </a:pPr>
-            <a:r>
-              <a:rPr sz="1300" b="1">
-                <a:solidFill>
-                  <a:srgbClr val="0B6E6E"/>
-                </a:solidFill>
-                <a:latin typeface="Calibri"/>
-              </a:rPr>
-              <a:t>■  </a:t>
-            </a:r>
-            <a:r>
-              <a:rPr sz="1900" b="0">
-                <a:solidFill>
-                  <a:srgbClr val="1F2933"/>
-                </a:solidFill>
-                <a:latin typeface="Calibri"/>
-              </a:rPr>
-              <a:t>Real inputs: six insurer wordings, 834 CMS marketplace plans, RIPLAY summaries</a:t>
-            </a:r>
-          </a:p>
-        </p:txBody>
-      </p:sp>
-      <p:sp>
-        <p:nvSpPr>
-          <p:cNvPr id="5" name="TextBox 4"/>
+              <a:t>Drop your hospital documents in the chat; the insurer's own claim form comes back, filled.</a:t>
+            </a:r>
+          </a:p>
+        </p:txBody>
+      </p:sp>
+      <p:sp>
+        <p:nvSpPr>
+          <p:cNvPr id="5" name="Rounded Rectangle 4"/>
+          <p:cNvSpPr/>
+          <p:nvPr/>
+        </p:nvSpPr>
+        <p:spPr>
+          <a:xfrm>
+            <a:off x="3544420" y="2002536"/>
+            <a:ext cx="5102855" cy="4361688"/>
+          </a:xfrm>
+          <a:prstGeom prst="roundRect">
+            <a:avLst>
+              <a:gd name="adj" fmla="val 3000"/>
+            </a:avLst>
+          </a:prstGeom>
+          <a:solidFill>
+            <a:srgbClr val="EEF2FF"/>
+          </a:solidFill>
+          <a:ln>
+            <a:noFill/>
+          </a:ln>
+          <a:effectLst/>
+        </p:spPr>
+        <p:style>
+          <a:lnRef idx="1">
+            <a:schemeClr val="accent1"/>
+          </a:lnRef>
+          <a:fillRef idx="3">
+            <a:schemeClr val="accent1"/>
+          </a:fillRef>
+          <a:effectRef idx="2">
+            <a:schemeClr val="accent1"/>
+          </a:effectRef>
+          <a:fontRef idx="minor">
+            <a:schemeClr val="lt1"/>
+          </a:fontRef>
+        </p:style>
+        <p:txBody>
+          <a:bodyPr rtlCol="0" anchor="ctr"/>
+          <a:lstStyle/>
+          <a:p>
+            <a:pPr algn="ctr"/>
+          </a:p>
+        </p:txBody>
+      </p:sp>
+      <p:pic>
+        <p:nvPicPr>
+          <p:cNvPr id="6" name="Picture 5" descr="form_crop.png"/>
+          <p:cNvPicPr>
+            <a:picLocks noChangeAspect="1"/>
+          </p:cNvPicPr>
+          <p:nvPr/>
+        </p:nvPicPr>
+        <p:blipFill>
+          <a:blip r:embed="rId2"/>
+          <a:stretch>
+            <a:fillRect/>
+          </a:stretch>
+        </p:blipFill>
+        <p:spPr>
+          <a:xfrm>
+            <a:off x="3599284" y="2057400"/>
+            <a:ext cx="4993127" cy="4251960"/>
+          </a:xfrm>
+          <a:prstGeom prst="rect">
+            <a:avLst/>
+          </a:prstGeom>
+        </p:spPr>
+      </p:pic>
+      <p:sp>
+        <p:nvSpPr>
+          <p:cNvPr id="7" name="TextBox 6"/>
           <p:cNvSpPr txBox="1"/>
           <p:nvPr/>
         </p:nvSpPr>
         <p:spPr>
           <a:xfrm>
-            <a:off x="640080" y="6400800"/>
-            <a:ext cx="10972800" cy="320040"/>
+            <a:off x="11094415" y="6400800"/>
+            <a:ext cx="548640" cy="274320"/>
           </a:xfrm>
           <a:prstGeom prst="rect">
             <a:avLst/>
@@ -5129,19 +4981,20 @@
           <a:noFill/>
         </p:spPr>
         <p:txBody>
-          <a:bodyPr wrap="none">
+          <a:bodyPr wrap="square">
             <a:spAutoFit/>
           </a:bodyPr>
           <a:lstStyle/>
           <a:p>
-            <a:r>
-              <a:rPr sz="1100" b="0">
+            <a:pPr algn="r"/>
+            <a:r>
+              <a:rPr sz="1000" b="0">
                 <a:solidFill>
                   <a:srgbClr val="5B6772"/>
                 </a:solidFill>
                 <a:latin typeface="Calibri"/>
               </a:rPr>
-              <a:t>ClauseGuard  |  FinTechathon 2026, Topic D  |  3/10</a:t>
+              <a:t>3/8</a:t>
             </a:r>
           </a:p>
         </p:txBody>
@@ -5173,18 +5026,17 @@
         <p:spPr>
           <a:xfrm>
             <a:off x="0" y="0"/>
-            <a:ext cx="228600" cy="6858000"/>
+            <a:ext cx="164592" cy="6858000"/>
           </a:xfrm>
           <a:prstGeom prst="rect">
             <a:avLst/>
           </a:prstGeom>
           <a:solidFill>
-            <a:srgbClr val="0B6E6E"/>
+            <a:srgbClr val="1E40AF"/>
           </a:solidFill>
           <a:ln>
             <a:noFill/>
           </a:ln>
-          <a:effectLst/>
         </p:spPr>
         <p:style>
           <a:lnRef idx="1">
@@ -5216,8 +5068,8 @@
         </p:nvSpPr>
         <p:spPr>
           <a:xfrm>
-            <a:off x="640080" y="365760"/>
-            <a:ext cx="10972800" cy="914400"/>
+            <a:off x="640080" y="411480"/>
+            <a:ext cx="10911535" cy="548640"/>
           </a:xfrm>
           <a:prstGeom prst="rect">
             <a:avLst/>
@@ -5230,39 +5082,75 @@
           </a:bodyPr>
           <a:lstStyle/>
           <a:p>
-            <a:r>
-              <a:rPr sz="3600" b="1">
+            <a:pPr algn="l"/>
+            <a:r>
+              <a:rPr sz="1300" b="1">
                 <a:solidFill>
-                  <a:srgbClr val="0B6E6E"/>
+                  <a:srgbClr val="1E40AF"/>
                 </a:solidFill>
                 <a:latin typeface="Calibri"/>
               </a:rPr>
-              <a:t>Architecture</a:t>
-            </a:r>
-          </a:p>
-        </p:txBody>
-      </p:sp>
-      <p:sp>
-        <p:nvSpPr>
-          <p:cNvPr id="4" name="Rectangle 3"/>
-          <p:cNvSpPr/>
+              <a:t>EVERY ANSWER CITES THE CLAUSE</a:t>
+            </a:r>
+          </a:p>
+        </p:txBody>
+      </p:sp>
+      <p:sp>
+        <p:nvSpPr>
+          <p:cNvPr id="4" name="TextBox 3"/>
+          <p:cNvSpPr txBox="1"/>
           <p:nvPr/>
         </p:nvSpPr>
         <p:spPr>
           <a:xfrm>
-            <a:off x="548640" y="1371600"/>
-            <a:ext cx="2029968" cy="914400"/>
+            <a:off x="640080" y="868680"/>
+            <a:ext cx="10911535" cy="1097280"/>
           </a:xfrm>
           <a:prstGeom prst="rect">
             <a:avLst/>
           </a:prstGeom>
+          <a:noFill/>
+        </p:spPr>
+        <p:txBody>
+          <a:bodyPr wrap="square">
+            <a:spAutoFit/>
+          </a:bodyPr>
+          <a:lstStyle/>
+          <a:p>
+            <a:pPr algn="l"/>
+            <a:r>
+              <a:rPr sz="2800" b="1">
+                <a:solidFill>
+                  <a:srgbClr val="14213D"/>
+                </a:solidFill>
+                <a:latin typeface="Calibri"/>
+              </a:rPr>
+              <a:t>Covered, for how much, by when — and the exact sentence that decides it.</a:t>
+            </a:r>
+          </a:p>
+        </p:txBody>
+      </p:sp>
+      <p:sp>
+        <p:nvSpPr>
+          <p:cNvPr id="5" name="Rounded Rectangle 4"/>
+          <p:cNvSpPr/>
+          <p:nvPr/>
+        </p:nvSpPr>
+        <p:spPr>
+          <a:xfrm>
+            <a:off x="2482175" y="2002536"/>
+            <a:ext cx="3813889" cy="4361688"/>
+          </a:xfrm>
+          <a:prstGeom prst="roundRect">
+            <a:avLst>
+              <a:gd name="adj" fmla="val 3000"/>
+            </a:avLst>
+          </a:prstGeom>
           <a:solidFill>
-            <a:srgbClr val="E8F1F1"/>
+            <a:srgbClr val="EEF2FF"/>
           </a:solidFill>
-          <a:ln w="15875">
-            <a:solidFill>
-              <a:srgbClr val="0B6E6E"/>
-            </a:solidFill>
+          <a:ln>
+            <a:noFill/>
           </a:ln>
           <a:effectLst/>
         </p:spPr>
@@ -5281,424 +5169,102 @@
           </a:fontRef>
         </p:style>
         <p:txBody>
-          <a:bodyPr rtlCol="0" anchor="ctr" wrap="square"/>
+          <a:bodyPr rtlCol="0" anchor="ctr"/>
           <a:lstStyle/>
           <a:p>
             <a:pPr algn="ctr"/>
-            <a:r>
-              <a:rPr sz="1300" b="1">
+          </a:p>
+        </p:txBody>
+      </p:sp>
+      <p:pic>
+        <p:nvPicPr>
+          <p:cNvPr id="6" name="Picture 5" descr="focus-verdict.png"/>
+          <p:cNvPicPr>
+            <a:picLocks noChangeAspect="1"/>
+          </p:cNvPicPr>
+          <p:nvPr/>
+        </p:nvPicPr>
+        <p:blipFill>
+          <a:blip r:embed="rId2"/>
+          <a:stretch>
+            <a:fillRect/>
+          </a:stretch>
+        </p:blipFill>
+        <p:spPr>
+          <a:xfrm>
+            <a:off x="2537039" y="2057400"/>
+            <a:ext cx="3704161" cy="4251960"/>
+          </a:xfrm>
+          <a:prstGeom prst="rect">
+            <a:avLst/>
+          </a:prstGeom>
+        </p:spPr>
+      </p:pic>
+      <p:sp>
+        <p:nvSpPr>
+          <p:cNvPr id="7" name="TextBox 6"/>
+          <p:cNvSpPr txBox="1"/>
+          <p:nvPr/>
+        </p:nvSpPr>
+        <p:spPr>
+          <a:xfrm>
+            <a:off x="8503919" y="2240280"/>
+            <a:ext cx="3047696" cy="914400"/>
+          </a:xfrm>
+          <a:prstGeom prst="rect">
+            <a:avLst/>
+          </a:prstGeom>
+          <a:noFill/>
+        </p:spPr>
+        <p:txBody>
+          <a:bodyPr wrap="square">
+            <a:spAutoFit/>
+          </a:bodyPr>
+          <a:lstStyle/>
+          <a:p>
+            <a:pPr>
+              <a:spcAft>
+                <a:spcPts val="800"/>
+              </a:spcAft>
+            </a:pPr>
+            <a:r>
+              <a:rPr sz="1500">
                 <a:solidFill>
                   <a:srgbClr val="1F2933"/>
                 </a:solidFill>
                 <a:latin typeface="Calibri"/>
               </a:rPr>
-              <a:t>PDF policy</a:t>
-            </a:r>
-          </a:p>
-        </p:txBody>
-      </p:sp>
-      <p:sp>
-        <p:nvSpPr>
-          <p:cNvPr id="5" name="Right Arrow 4"/>
-          <p:cNvSpPr/>
-          <p:nvPr/>
-        </p:nvSpPr>
-        <p:spPr>
-          <a:xfrm>
-            <a:off x="2596896" y="1691640"/>
-            <a:ext cx="192024" cy="274320"/>
-          </a:xfrm>
-          <a:prstGeom prst="rightArrow">
-            <a:avLst/>
-          </a:prstGeom>
-          <a:solidFill>
-            <a:srgbClr val="0B6E6E"/>
-          </a:solidFill>
-          <a:ln>
-            <a:noFill/>
-          </a:ln>
-        </p:spPr>
-        <p:style>
-          <a:lnRef idx="1">
-            <a:schemeClr val="accent1"/>
-          </a:lnRef>
-          <a:fillRef idx="3">
-            <a:schemeClr val="accent1"/>
-          </a:fillRef>
-          <a:effectRef idx="2">
-            <a:schemeClr val="accent1"/>
-          </a:effectRef>
-          <a:fontRef idx="minor">
-            <a:schemeClr val="lt1"/>
-          </a:fontRef>
-        </p:style>
-        <p:txBody>
-          <a:bodyPr rtlCol="0" anchor="ctr"/>
-          <a:lstStyle/>
-          <a:p>
-            <a:pPr algn="ctr"/>
-          </a:p>
-        </p:txBody>
-      </p:sp>
-      <p:sp>
-        <p:nvSpPr>
-          <p:cNvPr id="6" name="Rectangle 5"/>
-          <p:cNvSpPr/>
-          <p:nvPr/>
-        </p:nvSpPr>
-        <p:spPr>
-          <a:xfrm>
-            <a:off x="2807208" y="1371600"/>
-            <a:ext cx="2029968" cy="914400"/>
-          </a:xfrm>
-          <a:prstGeom prst="rect">
-            <a:avLst/>
-          </a:prstGeom>
-          <a:solidFill>
-            <a:srgbClr val="E8F1F1"/>
-          </a:solidFill>
-          <a:ln w="15875">
-            <a:solidFill>
-              <a:srgbClr val="0B6E6E"/>
-            </a:solidFill>
-          </a:ln>
-          <a:effectLst/>
-        </p:spPr>
-        <p:style>
-          <a:lnRef idx="1">
-            <a:schemeClr val="accent1"/>
-          </a:lnRef>
-          <a:fillRef idx="3">
-            <a:schemeClr val="accent1"/>
-          </a:fillRef>
-          <a:effectRef idx="2">
-            <a:schemeClr val="accent1"/>
-          </a:effectRef>
-          <a:fontRef idx="minor">
-            <a:schemeClr val="lt1"/>
-          </a:fontRef>
-        </p:style>
-        <p:txBody>
-          <a:bodyPr rtlCol="0" anchor="ctr" wrap="square"/>
-          <a:lstStyle/>
-          <a:p>
-            <a:pPr algn="ctr"/>
-            <a:r>
-              <a:rPr sz="1300" b="1">
+              <a:t>•  A rules engine decides; the model only reads, binds facts and words the reply</a:t>
+            </a:r>
+          </a:p>
+          <a:p>
+            <a:pPr>
+              <a:spcAft>
+                <a:spcPts val="800"/>
+              </a:spcAft>
+            </a:pPr>
+            <a:r>
+              <a:rPr sz="1500">
                 <a:solidFill>
                   <a:srgbClr val="1F2933"/>
                 </a:solidFill>
                 <a:latin typeface="Calibri"/>
               </a:rPr>
-              <a:t>Quarantined extractor</a:t>
-            </a:r>
-          </a:p>
-        </p:txBody>
-      </p:sp>
-      <p:sp>
-        <p:nvSpPr>
-          <p:cNvPr id="7" name="Right Arrow 6"/>
-          <p:cNvSpPr/>
-          <p:nvPr/>
-        </p:nvSpPr>
-        <p:spPr>
-          <a:xfrm>
-            <a:off x="4855464" y="1691640"/>
-            <a:ext cx="192024" cy="274320"/>
-          </a:xfrm>
-          <a:prstGeom prst="rightArrow">
-            <a:avLst/>
-          </a:prstGeom>
-          <a:solidFill>
-            <a:srgbClr val="0B6E6E"/>
-          </a:solidFill>
-          <a:ln>
-            <a:noFill/>
-          </a:ln>
-        </p:spPr>
-        <p:style>
-          <a:lnRef idx="1">
-            <a:schemeClr val="accent1"/>
-          </a:lnRef>
-          <a:fillRef idx="3">
-            <a:schemeClr val="accent1"/>
-          </a:fillRef>
-          <a:effectRef idx="2">
-            <a:schemeClr val="accent1"/>
-          </a:effectRef>
-          <a:fontRef idx="minor">
-            <a:schemeClr val="lt1"/>
-          </a:fontRef>
-        </p:style>
-        <p:txBody>
-          <a:bodyPr rtlCol="0" anchor="ctr"/>
-          <a:lstStyle/>
-          <a:p>
-            <a:pPr algn="ctr"/>
-          </a:p>
-        </p:txBody>
-      </p:sp>
-      <p:sp>
-        <p:nvSpPr>
-          <p:cNvPr id="8" name="Rectangle 7"/>
-          <p:cNvSpPr/>
-          <p:nvPr/>
-        </p:nvSpPr>
-        <p:spPr>
-          <a:xfrm>
-            <a:off x="5065776" y="1371600"/>
-            <a:ext cx="2029968" cy="914400"/>
-          </a:xfrm>
-          <a:prstGeom prst="rect">
-            <a:avLst/>
-          </a:prstGeom>
-          <a:solidFill>
-            <a:srgbClr val="E8F1F1"/>
-          </a:solidFill>
-          <a:ln w="15875">
-            <a:solidFill>
-              <a:srgbClr val="0B6E6E"/>
-            </a:solidFill>
-          </a:ln>
-          <a:effectLst/>
-        </p:spPr>
-        <p:style>
-          <a:lnRef idx="1">
-            <a:schemeClr val="accent1"/>
-          </a:lnRef>
-          <a:fillRef idx="3">
-            <a:schemeClr val="accent1"/>
-          </a:fillRef>
-          <a:effectRef idx="2">
-            <a:schemeClr val="accent1"/>
-          </a:effectRef>
-          <a:fontRef idx="minor">
-            <a:schemeClr val="lt1"/>
-          </a:fontRef>
-        </p:style>
-        <p:txBody>
-          <a:bodyPr rtlCol="0" anchor="ctr" wrap="square"/>
-          <a:lstStyle/>
-          <a:p>
-            <a:pPr algn="ctr"/>
-            <a:r>
-              <a:rPr sz="1300" b="1">
-                <a:solidFill>
-                  <a:srgbClr val="1F2933"/>
-                </a:solidFill>
-                <a:latin typeface="Calibri"/>
-              </a:rPr>
-              <a:t>Typed clause store</a:t>
-            </a:r>
-          </a:p>
-        </p:txBody>
-      </p:sp>
-      <p:sp>
-        <p:nvSpPr>
-          <p:cNvPr id="9" name="Right Arrow 8"/>
-          <p:cNvSpPr/>
-          <p:nvPr/>
-        </p:nvSpPr>
-        <p:spPr>
-          <a:xfrm>
-            <a:off x="7114032" y="1691640"/>
-            <a:ext cx="192024" cy="274320"/>
-          </a:xfrm>
-          <a:prstGeom prst="rightArrow">
-            <a:avLst/>
-          </a:prstGeom>
-          <a:solidFill>
-            <a:srgbClr val="0B6E6E"/>
-          </a:solidFill>
-          <a:ln>
-            <a:noFill/>
-          </a:ln>
-        </p:spPr>
-        <p:style>
-          <a:lnRef idx="1">
-            <a:schemeClr val="accent1"/>
-          </a:lnRef>
-          <a:fillRef idx="3">
-            <a:schemeClr val="accent1"/>
-          </a:fillRef>
-          <a:effectRef idx="2">
-            <a:schemeClr val="accent1"/>
-          </a:effectRef>
-          <a:fontRef idx="minor">
-            <a:schemeClr val="lt1"/>
-          </a:fontRef>
-        </p:style>
-        <p:txBody>
-          <a:bodyPr rtlCol="0" anchor="ctr"/>
-          <a:lstStyle/>
-          <a:p>
-            <a:pPr algn="ctr"/>
-          </a:p>
-        </p:txBody>
-      </p:sp>
-      <p:sp>
-        <p:nvSpPr>
-          <p:cNvPr id="10" name="Rectangle 9"/>
-          <p:cNvSpPr/>
-          <p:nvPr/>
-        </p:nvSpPr>
-        <p:spPr>
-          <a:xfrm>
-            <a:off x="7324344" y="1371600"/>
-            <a:ext cx="2029968" cy="914400"/>
-          </a:xfrm>
-          <a:prstGeom prst="rect">
-            <a:avLst/>
-          </a:prstGeom>
-          <a:solidFill>
-            <a:srgbClr val="E8F1F1"/>
-          </a:solidFill>
-          <a:ln w="15875">
-            <a:solidFill>
-              <a:srgbClr val="0B6E6E"/>
-            </a:solidFill>
-          </a:ln>
-          <a:effectLst/>
-        </p:spPr>
-        <p:style>
-          <a:lnRef idx="1">
-            <a:schemeClr val="accent1"/>
-          </a:lnRef>
-          <a:fillRef idx="3">
-            <a:schemeClr val="accent1"/>
-          </a:fillRef>
-          <a:effectRef idx="2">
-            <a:schemeClr val="accent1"/>
-          </a:effectRef>
-          <a:fontRef idx="minor">
-            <a:schemeClr val="lt1"/>
-          </a:fontRef>
-        </p:style>
-        <p:txBody>
-          <a:bodyPr rtlCol="0" anchor="ctr" wrap="square"/>
-          <a:lstStyle/>
-          <a:p>
-            <a:pPr algn="ctr"/>
-            <a:r>
-              <a:rPr sz="1300" b="1">
-                <a:solidFill>
-                  <a:srgbClr val="1F2933"/>
-                </a:solidFill>
-                <a:latin typeface="Calibri"/>
-              </a:rPr>
-              <a:t>Deterministic solver</a:t>
-            </a:r>
-          </a:p>
-        </p:txBody>
-      </p:sp>
-      <p:sp>
-        <p:nvSpPr>
-          <p:cNvPr id="11" name="Right Arrow 10"/>
-          <p:cNvSpPr/>
-          <p:nvPr/>
-        </p:nvSpPr>
-        <p:spPr>
-          <a:xfrm>
-            <a:off x="9372600" y="1691640"/>
-            <a:ext cx="192024" cy="274320"/>
-          </a:xfrm>
-          <a:prstGeom prst="rightArrow">
-            <a:avLst/>
-          </a:prstGeom>
-          <a:solidFill>
-            <a:srgbClr val="0B6E6E"/>
-          </a:solidFill>
-          <a:ln>
-            <a:noFill/>
-          </a:ln>
-        </p:spPr>
-        <p:style>
-          <a:lnRef idx="1">
-            <a:schemeClr val="accent1"/>
-          </a:lnRef>
-          <a:fillRef idx="3">
-            <a:schemeClr val="accent1"/>
-          </a:fillRef>
-          <a:effectRef idx="2">
-            <a:schemeClr val="accent1"/>
-          </a:effectRef>
-          <a:fontRef idx="minor">
-            <a:schemeClr val="lt1"/>
-          </a:fontRef>
-        </p:style>
-        <p:txBody>
-          <a:bodyPr rtlCol="0" anchor="ctr"/>
-          <a:lstStyle/>
-          <a:p>
-            <a:pPr algn="ctr"/>
-          </a:p>
-        </p:txBody>
-      </p:sp>
-      <p:sp>
-        <p:nvSpPr>
-          <p:cNvPr id="12" name="Rectangle 11"/>
-          <p:cNvSpPr/>
-          <p:nvPr/>
-        </p:nvSpPr>
-        <p:spPr>
-          <a:xfrm>
-            <a:off x="9582912" y="1371600"/>
-            <a:ext cx="2029968" cy="914400"/>
-          </a:xfrm>
-          <a:prstGeom prst="rect">
-            <a:avLst/>
-          </a:prstGeom>
-          <a:solidFill>
-            <a:srgbClr val="E8F1F1"/>
-          </a:solidFill>
-          <a:ln w="15875">
-            <a:solidFill>
-              <a:srgbClr val="0B6E6E"/>
-            </a:solidFill>
-          </a:ln>
-          <a:effectLst/>
-        </p:spPr>
-        <p:style>
-          <a:lnRef idx="1">
-            <a:schemeClr val="accent1"/>
-          </a:lnRef>
-          <a:fillRef idx="3">
-            <a:schemeClr val="accent1"/>
-          </a:fillRef>
-          <a:effectRef idx="2">
-            <a:schemeClr val="accent1"/>
-          </a:effectRef>
-          <a:fontRef idx="minor">
-            <a:schemeClr val="lt1"/>
-          </a:fontRef>
-        </p:style>
-        <p:txBody>
-          <a:bodyPr rtlCol="0" anchor="ctr" wrap="square"/>
-          <a:lstStyle/>
-          <a:p>
-            <a:pPr algn="ctr"/>
-            <a:r>
-              <a:rPr sz="1300" b="1">
-                <a:solidFill>
-                  <a:srgbClr val="1F2933"/>
-                </a:solidFill>
-                <a:latin typeface="Calibri"/>
-              </a:rPr>
-              <a:t>Cited reply</a:t>
-            </a:r>
-          </a:p>
-        </p:txBody>
-      </p:sp>
-      <p:sp>
-        <p:nvSpPr>
-          <p:cNvPr id="13" name="TextBox 12"/>
+              <a:t>•  One question is asked only when one missing fact would change the outcome</a:t>
+            </a:r>
+          </a:p>
+        </p:txBody>
+      </p:sp>
+      <p:sp>
+        <p:nvSpPr>
+          <p:cNvPr id="8" name="TextBox 7"/>
           <p:cNvSpPr txBox="1"/>
           <p:nvPr/>
         </p:nvSpPr>
         <p:spPr>
           <a:xfrm>
-            <a:off x="640080" y="2651760"/>
-            <a:ext cx="10972800" cy="3749040"/>
+            <a:off x="11094415" y="6400800"/>
+            <a:ext cx="548640" cy="274320"/>
           </a:xfrm>
           <a:prstGeom prst="rect">
             <a:avLst/>
@@ -5711,162 +5277,15 @@
           </a:bodyPr>
           <a:lstStyle/>
           <a:p>
-            <a:pPr>
-              <a:spcAft>
-                <a:spcPts val="1200"/>
-              </a:spcAft>
-            </a:pPr>
-            <a:r>
-              <a:rPr sz="1300" b="1">
-                <a:solidFill>
-                  <a:srgbClr val="0B6E6E"/>
-                </a:solidFill>
-                <a:latin typeface="Calibri"/>
-              </a:rPr>
-              <a:t>■  </a:t>
-            </a:r>
-            <a:r>
-              <a:rPr sz="1900" b="0">
-                <a:solidFill>
-                  <a:srgbClr val="1F2933"/>
-                </a:solidFill>
-                <a:latin typeface="Calibri"/>
-              </a:rPr>
-              <a:t>Agents that read: Document Reader (policy PDF to typed rules), Conversation Agent (new situation, follow-up, correction, what-if), Fact Agent, Explainer, Watchdog</a:t>
-            </a:r>
-          </a:p>
-          <a:p>
-            <a:pPr>
-              <a:spcAft>
-                <a:spcPts val="1200"/>
-              </a:spcAft>
-            </a:pPr>
-            <a:r>
-              <a:rPr sz="1300" b="1">
-                <a:solidFill>
-                  <a:srgbClr val="0B6E6E"/>
-                </a:solidFill>
-                <a:latin typeface="Calibri"/>
-              </a:rPr>
-              <a:t>■  </a:t>
-            </a:r>
-            <a:r>
-              <a:rPr sz="1900" b="0">
-                <a:solidFill>
-                  <a:srgbClr val="1F2933"/>
-                </a:solidFill>
-                <a:latin typeface="Calibri"/>
-              </a:rPr>
-              <a:t>Code that decides: four solvers, the permission enforcer (T0 to T3), the hash-chained audit log</a:t>
-            </a:r>
-          </a:p>
-          <a:p>
-            <a:pPr>
-              <a:spcAft>
-                <a:spcPts val="1200"/>
-              </a:spcAft>
-            </a:pPr>
-            <a:r>
-              <a:rPr sz="1300" b="1">
-                <a:solidFill>
-                  <a:srgbClr val="0B6E6E"/>
-                </a:solidFill>
-                <a:latin typeface="Calibri"/>
-              </a:rPr>
-              <a:t>■  </a:t>
-            </a:r>
-            <a:r>
-              <a:rPr sz="1900" b="0">
-                <a:solidFill>
-                  <a:srgbClr val="1F2933"/>
-                </a:solidFill>
-                <a:latin typeface="Calibri"/>
-              </a:rPr>
-              <a:t>Claims: the insurer's own form laid out from its clauses, filled from typed facts, shown before Confirm; uploads matched to the policy's document list</a:t>
-            </a:r>
-          </a:p>
-          <a:p>
-            <a:pPr>
-              <a:spcAft>
-                <a:spcPts val="1200"/>
-              </a:spcAft>
-            </a:pPr>
-            <a:r>
-              <a:rPr sz="1300" b="1">
-                <a:solidFill>
-                  <a:srgbClr val="0B6E6E"/>
-                </a:solidFill>
-                <a:latin typeface="Calibri"/>
-              </a:rPr>
-              <a:t>■  </a:t>
-            </a:r>
-            <a:r>
-              <a:rPr sz="1900" b="0">
-                <a:solidFill>
-                  <a:srgbClr val="1F2933"/>
-                </a:solidFill>
-                <a:latin typeface="Calibri"/>
-              </a:rPr>
-              <a:t>Insurer side: a claims desk receives form and attachments, decides with a note, can halt the agent; the decision returns to the customer</a:t>
-            </a:r>
-          </a:p>
-          <a:p>
-            <a:pPr>
-              <a:spcAft>
-                <a:spcPts val="1200"/>
-              </a:spcAft>
-            </a:pPr>
-            <a:r>
-              <a:rPr sz="1300" b="1">
-                <a:solidFill>
-                  <a:srgbClr val="0B6E6E"/>
-                </a:solidFill>
-                <a:latin typeface="Calibri"/>
-              </a:rPr>
-              <a:t>■  </a:t>
-            </a:r>
-            <a:r>
-              <a:rPr sz="1900" b="0">
-                <a:solidFill>
-                  <a:srgbClr val="1F2933"/>
-                </a:solidFill>
-                <a:latin typeface="Calibri"/>
-              </a:rPr>
-              <a:t>Rule packs as data: Indonesia (statutory first, group before individual) and a generic pack</a:t>
-            </a:r>
-          </a:p>
-        </p:txBody>
-      </p:sp>
-      <p:sp>
-        <p:nvSpPr>
-          <p:cNvPr id="14" name="TextBox 13"/>
-          <p:cNvSpPr txBox="1"/>
-          <p:nvPr/>
-        </p:nvSpPr>
-        <p:spPr>
-          <a:xfrm>
-            <a:off x="640080" y="6400800"/>
-            <a:ext cx="10972800" cy="320040"/>
-          </a:xfrm>
-          <a:prstGeom prst="rect">
-            <a:avLst/>
-          </a:prstGeom>
-          <a:noFill/>
-        </p:spPr>
-        <p:txBody>
-          <a:bodyPr wrap="none">
-            <a:spAutoFit/>
-          </a:bodyPr>
-          <a:lstStyle/>
-          <a:p>
-            <a:r>
-              <a:rPr sz="1100" b="0">
+            <a:pPr algn="r"/>
+            <a:r>
+              <a:rPr sz="1000" b="0">
                 <a:solidFill>
                   <a:srgbClr val="5B6772"/>
                 </a:solidFill>
                 <a:latin typeface="Calibri"/>
               </a:rPr>
-              <a:t>ClauseGuard  |  FinTechathon 2026, Topic D  |  4/10</a:t>
+              <a:t>4/8</a:t>
             </a:r>
           </a:p>
         </p:txBody>
@@ -5898,18 +5317,17 @@
         <p:spPr>
           <a:xfrm>
             <a:off x="0" y="0"/>
-            <a:ext cx="228600" cy="6858000"/>
+            <a:ext cx="164592" cy="6858000"/>
           </a:xfrm>
           <a:prstGeom prst="rect">
             <a:avLst/>
           </a:prstGeom>
           <a:solidFill>
-            <a:srgbClr val="0B6E6E"/>
+            <a:srgbClr val="1E40AF"/>
           </a:solidFill>
           <a:ln>
             <a:noFill/>
           </a:ln>
-          <a:effectLst/>
         </p:spPr>
         <p:style>
           <a:lnRef idx="1">
@@ -5941,8 +5359,8 @@
         </p:nvSpPr>
         <p:spPr>
           <a:xfrm>
-            <a:off x="640080" y="365760"/>
-            <a:ext cx="10972800" cy="914400"/>
+            <a:off x="640080" y="411480"/>
+            <a:ext cx="10911535" cy="548640"/>
           </a:xfrm>
           <a:prstGeom prst="rect">
             <a:avLst/>
@@ -5955,14 +5373,15 @@
           </a:bodyPr>
           <a:lstStyle/>
           <a:p>
-            <a:r>
-              <a:rPr sz="3600" b="1">
+            <a:pPr algn="l"/>
+            <a:r>
+              <a:rPr sz="1300" b="1">
                 <a:solidFill>
-                  <a:srgbClr val="0B6E6E"/>
+                  <a:srgbClr val="1E40AF"/>
                 </a:solidFill>
                 <a:latin typeface="Calibri"/>
               </a:rPr>
-              <a:t>Solver 1, verdict, with one example</a:t>
+              <a:t>IT ACTS, AND THE DECISION COMES BACK</a:t>
             </a:r>
           </a:p>
         </p:txBody>
@@ -5975,8 +5394,8 @@
         </p:nvSpPr>
         <p:spPr>
           <a:xfrm>
-            <a:off x="640080" y="1371600"/>
-            <a:ext cx="10972800" cy="5029200"/>
+            <a:off x="640080" y="868680"/>
+            <a:ext cx="10911535" cy="1097280"/>
           </a:xfrm>
           <a:prstGeom prst="rect">
             <a:avLst/>
@@ -5989,142 +5408,169 @@
           </a:bodyPr>
           <a:lstStyle/>
           <a:p>
-            <a:pPr>
-              <a:spcAft>
-                <a:spcPts val="1200"/>
-              </a:spcAft>
-            </a:pPr>
-            <a:r>
-              <a:rPr sz="1300" b="1">
+            <a:pPr algn="l"/>
+            <a:r>
+              <a:rPr sz="2800" b="1">
                 <a:solidFill>
-                  <a:srgbClr val="0B6E6E"/>
+                  <a:srgbClr val="14213D"/>
                 </a:solidFill>
                 <a:latin typeface="Calibri"/>
               </a:rPr>
-              <a:t>■  </a:t>
-            </a:r>
-            <a:r>
-              <a:rPr sz="1900" b="0">
-                <a:solidFill>
-                  <a:srgbClr val="1F2933"/>
-                </a:solidFill>
-                <a:latin typeface="Calibri"/>
-              </a:rPr>
-              <a:t>Order: candidates, closed world, exclusions unless excepted, periods and conditions, termination, else covered with payable</a:t>
-            </a:r>
-          </a:p>
-          <a:p>
-            <a:pPr>
-              <a:spcAft>
-                <a:spcPts val="1200"/>
-              </a:spcAft>
-            </a:pPr>
-            <a:r>
-              <a:rPr sz="1300" b="1">
-                <a:solidFill>
-                  <a:srgbClr val="0B6E6E"/>
-                </a:solidFill>
-                <a:latin typeface="Calibri"/>
-              </a:rPr>
-              <a:t>■  </a:t>
-            </a:r>
-            <a:r>
-              <a:rPr sz="1900" b="0">
-                <a:solidFill>
-                  <a:srgbClr val="1F2933"/>
-                </a:solidFill>
-                <a:latin typeface="Calibri"/>
-              </a:rPr>
-              <a:t>Tuple: HAS_PERIOD WAITING, 30 days, exempt if accident or emergency</a:t>
-            </a:r>
-          </a:p>
-          <a:p>
-            <a:pPr>
-              <a:spcAft>
-                <a:spcPts val="1200"/>
-              </a:spcAft>
-            </a:pPr>
-            <a:r>
-              <a:rPr sz="1300" b="1">
-                <a:solidFill>
-                  <a:srgbClr val="0B6E6E"/>
-                </a:solidFill>
-                <a:latin typeface="Calibri"/>
-              </a:rPr>
-              <a:t>■  </a:t>
-            </a:r>
-            <a:r>
-              <a:rPr sz="1900" b="0">
-                <a:solidFill>
-                  <a:srgbClr val="1F2933"/>
-                </a:solidFill>
-                <a:latin typeface="Calibri"/>
-              </a:rPr>
-              <a:t>Facts: hospitalised for illness, 20 days after the effective date: DENIED, code WAITING_PERIOD, clause quoted</a:t>
-            </a:r>
-          </a:p>
-          <a:p>
-            <a:pPr>
-              <a:spcAft>
-                <a:spcPts val="1200"/>
-              </a:spcAft>
-            </a:pPr>
-            <a:r>
-              <a:rPr sz="1300" b="1">
-                <a:solidFill>
-                  <a:srgbClr val="0B6E6E"/>
-                </a:solidFill>
-                <a:latin typeface="Calibri"/>
-              </a:rPr>
-              <a:t>■  </a:t>
-            </a:r>
-            <a:r>
-              <a:rPr sz="1900" b="0">
-                <a:solidFill>
-                  <a:srgbClr val="1F2933"/>
-                </a:solidFill>
-                <a:latin typeface="Calibri"/>
-              </a:rPr>
-              <a:t>Day 44 and 5 hospital days at IDR 500,000: COVERED, IDR 2,500,000</a:t>
-            </a:r>
-          </a:p>
-          <a:p>
-            <a:pPr>
-              <a:spcAft>
-                <a:spcPts val="1200"/>
-              </a:spcAft>
-            </a:pPr>
-            <a:r>
-              <a:rPr sz="1300" b="1">
-                <a:solidFill>
-                  <a:srgbClr val="0B6E6E"/>
-                </a:solidFill>
-                <a:latin typeface="Calibri"/>
-              </a:rPr>
-              <a:t>■  </a:t>
-            </a:r>
-            <a:r>
-              <a:rPr sz="1900" b="0">
-                <a:solidFill>
-                  <a:srgbClr val="1F2933"/>
-                </a:solidFill>
-                <a:latin typeface="Calibri"/>
-              </a:rPr>
-              <a:t>Clarify by verdict sensitivity: try every value of a missing fact; ask only if the verdict changes</a:t>
-            </a:r>
-          </a:p>
-        </p:txBody>
-      </p:sp>
-      <p:sp>
-        <p:nvSpPr>
-          <p:cNvPr id="5" name="TextBox 4"/>
+              <a:t>After one tap, the claim reaches the insurer's desk; the adjuster's decision returns to the chat.</a:t>
+            </a:r>
+          </a:p>
+        </p:txBody>
+      </p:sp>
+      <p:sp>
+        <p:nvSpPr>
+          <p:cNvPr id="5" name="Rounded Rectangle 4"/>
+          <p:cNvSpPr/>
+          <p:nvPr/>
+        </p:nvSpPr>
+        <p:spPr>
+          <a:xfrm>
+            <a:off x="2061365" y="2002536"/>
+            <a:ext cx="2476036" cy="4361688"/>
+          </a:xfrm>
+          <a:prstGeom prst="roundRect">
+            <a:avLst>
+              <a:gd name="adj" fmla="val 3000"/>
+            </a:avLst>
+          </a:prstGeom>
+          <a:solidFill>
+            <a:srgbClr val="EEF2FF"/>
+          </a:solidFill>
+          <a:ln>
+            <a:noFill/>
+          </a:ln>
+          <a:effectLst/>
+        </p:spPr>
+        <p:style>
+          <a:lnRef idx="1">
+            <a:schemeClr val="accent1"/>
+          </a:lnRef>
+          <a:fillRef idx="3">
+            <a:schemeClr val="accent1"/>
+          </a:fillRef>
+          <a:effectRef idx="2">
+            <a:schemeClr val="accent1"/>
+          </a:effectRef>
+          <a:fontRef idx="minor">
+            <a:schemeClr val="lt1"/>
+          </a:fontRef>
+        </p:style>
+        <p:txBody>
+          <a:bodyPr rtlCol="0" anchor="ctr"/>
+          <a:lstStyle/>
+          <a:p>
+            <a:pPr algn="ctr"/>
+          </a:p>
+        </p:txBody>
+      </p:sp>
+      <p:pic>
+        <p:nvPicPr>
+          <p:cNvPr id="6" name="Picture 5" descr="focus-insurer.png"/>
+          <p:cNvPicPr>
+            <a:picLocks noChangeAspect="1"/>
+          </p:cNvPicPr>
+          <p:nvPr/>
+        </p:nvPicPr>
+        <p:blipFill>
+          <a:blip r:embed="rId2"/>
+          <a:stretch>
+            <a:fillRect/>
+          </a:stretch>
+        </p:blipFill>
+        <p:spPr>
+          <a:xfrm>
+            <a:off x="2116229" y="2057400"/>
+            <a:ext cx="2366308" cy="4251960"/>
+          </a:xfrm>
+          <a:prstGeom prst="rect">
+            <a:avLst/>
+          </a:prstGeom>
+        </p:spPr>
+      </p:pic>
+      <p:sp>
+        <p:nvSpPr>
+          <p:cNvPr id="7" name="Rounded Rectangle 6"/>
+          <p:cNvSpPr/>
+          <p:nvPr/>
+        </p:nvSpPr>
+        <p:spPr>
+          <a:xfrm>
+            <a:off x="6392569" y="2002536"/>
+            <a:ext cx="4999482" cy="4361688"/>
+          </a:xfrm>
+          <a:prstGeom prst="roundRect">
+            <a:avLst>
+              <a:gd name="adj" fmla="val 3000"/>
+            </a:avLst>
+          </a:prstGeom>
+          <a:solidFill>
+            <a:srgbClr val="EEF2FF"/>
+          </a:solidFill>
+          <a:ln>
+            <a:noFill/>
+          </a:ln>
+          <a:effectLst/>
+        </p:spPr>
+        <p:style>
+          <a:lnRef idx="1">
+            <a:schemeClr val="accent1"/>
+          </a:lnRef>
+          <a:fillRef idx="3">
+            <a:schemeClr val="accent1"/>
+          </a:fillRef>
+          <a:effectRef idx="2">
+            <a:schemeClr val="accent1"/>
+          </a:effectRef>
+          <a:fontRef idx="minor">
+            <a:schemeClr val="lt1"/>
+          </a:fontRef>
+        </p:style>
+        <p:txBody>
+          <a:bodyPr rtlCol="0" anchor="ctr"/>
+          <a:lstStyle/>
+          <a:p>
+            <a:pPr algn="ctr"/>
+          </a:p>
+        </p:txBody>
+      </p:sp>
+      <p:pic>
+        <p:nvPicPr>
+          <p:cNvPr id="8" name="Picture 7" descr="decision_crop.png"/>
+          <p:cNvPicPr>
+            <a:picLocks noChangeAspect="1"/>
+          </p:cNvPicPr>
+          <p:nvPr/>
+        </p:nvPicPr>
+        <p:blipFill>
+          <a:blip r:embed="rId3"/>
+          <a:stretch>
+            <a:fillRect/>
+          </a:stretch>
+        </p:blipFill>
+        <p:spPr>
+          <a:xfrm>
+            <a:off x="6447433" y="2057400"/>
+            <a:ext cx="4889754" cy="4251960"/>
+          </a:xfrm>
+          <a:prstGeom prst="rect">
+            <a:avLst/>
+          </a:prstGeom>
+        </p:spPr>
+      </p:pic>
+      <p:sp>
+        <p:nvSpPr>
+          <p:cNvPr id="9" name="TextBox 8"/>
           <p:cNvSpPr txBox="1"/>
           <p:nvPr/>
         </p:nvSpPr>
         <p:spPr>
           <a:xfrm>
-            <a:off x="640080" y="6400800"/>
-            <a:ext cx="10972800" cy="320040"/>
+            <a:off x="11094415" y="6400800"/>
+            <a:ext cx="548640" cy="274320"/>
           </a:xfrm>
           <a:prstGeom prst="rect">
             <a:avLst/>
@@ -6132,19 +5578,20 @@
           <a:noFill/>
         </p:spPr>
         <p:txBody>
-          <a:bodyPr wrap="none">
+          <a:bodyPr wrap="square">
             <a:spAutoFit/>
           </a:bodyPr>
           <a:lstStyle/>
           <a:p>
-            <a:r>
-              <a:rPr sz="1100" b="0">
+            <a:pPr algn="r"/>
+            <a:r>
+              <a:rPr sz="1000" b="0">
                 <a:solidFill>
                   <a:srgbClr val="5B6772"/>
                 </a:solidFill>
                 <a:latin typeface="Calibri"/>
               </a:rPr>
-              <a:t>ClauseGuard  |  FinTechathon 2026, Topic D  |  5/10</a:t>
+              <a:t>5/8</a:t>
             </a:r>
           </a:p>
         </p:txBody>
@@ -6176,18 +5623,17 @@
         <p:spPr>
           <a:xfrm>
             <a:off x="0" y="0"/>
-            <a:ext cx="228600" cy="6858000"/>
+            <a:ext cx="164592" cy="6858000"/>
           </a:xfrm>
           <a:prstGeom prst="rect">
             <a:avLst/>
           </a:prstGeom>
           <a:solidFill>
-            <a:srgbClr val="0B6E6E"/>
+            <a:srgbClr val="1E40AF"/>
           </a:solidFill>
           <a:ln>
             <a:noFill/>
           </a:ln>
-          <a:effectLst/>
         </p:spPr>
         <p:style>
           <a:lnRef idx="1">
@@ -6219,8 +5665,8 @@
         </p:nvSpPr>
         <p:spPr>
           <a:xfrm>
-            <a:off x="640080" y="365760"/>
-            <a:ext cx="10972800" cy="914400"/>
+            <a:off x="640080" y="411480"/>
+            <a:ext cx="10911535" cy="548640"/>
           </a:xfrm>
           <a:prstGeom prst="rect">
             <a:avLst/>
@@ -6233,14 +5679,15 @@
           </a:bodyPr>
           <a:lstStyle/>
           <a:p>
-            <a:r>
-              <a:rPr sz="3600" b="1">
+            <a:pPr algn="l"/>
+            <a:r>
+              <a:rPr sz="1300" b="1">
                 <a:solidFill>
-                  <a:srgbClr val="0B6E6E"/>
+                  <a:srgbClr val="1E40AF"/>
                 </a:solidFill>
                 <a:latin typeface="Calibri"/>
               </a:rPr>
-              <a:t>Solvers 2 to 4, entitlement beyond the verdict</a:t>
+              <a:t>IT CANNOT TOUCH YOUR MONEY</a:t>
             </a:r>
           </a:p>
         </p:txBody>
@@ -6253,8 +5700,8 @@
         </p:nvSpPr>
         <p:spPr>
           <a:xfrm>
-            <a:off x="640080" y="1371600"/>
-            <a:ext cx="10972800" cy="5029200"/>
+            <a:off x="640080" y="868680"/>
+            <a:ext cx="10911535" cy="1097280"/>
           </a:xfrm>
           <a:prstGeom prst="rect">
             <a:avLst/>
@@ -6267,142 +5714,154 @@
           </a:bodyPr>
           <a:lstStyle/>
           <a:p>
-            <a:pPr>
-              <a:spcAft>
-                <a:spcPts val="1200"/>
-              </a:spcAft>
-            </a:pPr>
-            <a:r>
-              <a:rPr sz="1300" b="1">
+            <a:pPr algn="l"/>
+            <a:r>
+              <a:rPr sz="2800" b="1">
                 <a:solidFill>
-                  <a:srgbClr val="0B6E6E"/>
+                  <a:srgbClr val="14213D"/>
                 </a:solidFill>
                 <a:latin typeface="Calibri"/>
               </a:rPr>
-              <a:t>■  </a:t>
-            </a:r>
-            <a:r>
-              <a:rPr sz="1900" b="0">
+              <a:t>Permission is enforced in code: read, compute, send after Confirm — money and identity, never.</a:t>
+            </a:r>
+          </a:p>
+        </p:txBody>
+      </p:sp>
+      <p:sp>
+        <p:nvSpPr>
+          <p:cNvPr id="5" name="Rounded Rectangle 4"/>
+          <p:cNvSpPr/>
+          <p:nvPr/>
+        </p:nvSpPr>
+        <p:spPr>
+          <a:xfrm>
+            <a:off x="585216" y="2554975"/>
+            <a:ext cx="7607807" cy="3256809"/>
+          </a:xfrm>
+          <a:prstGeom prst="roundRect">
+            <a:avLst>
+              <a:gd name="adj" fmla="val 3000"/>
+            </a:avLst>
+          </a:prstGeom>
+          <a:solidFill>
+            <a:srgbClr val="EEF2FF"/>
+          </a:solidFill>
+          <a:ln>
+            <a:noFill/>
+          </a:ln>
+          <a:effectLst/>
+        </p:spPr>
+        <p:style>
+          <a:lnRef idx="1">
+            <a:schemeClr val="accent1"/>
+          </a:lnRef>
+          <a:fillRef idx="3">
+            <a:schemeClr val="accent1"/>
+          </a:fillRef>
+          <a:effectRef idx="2">
+            <a:schemeClr val="accent1"/>
+          </a:effectRef>
+          <a:fontRef idx="minor">
+            <a:schemeClr val="lt1"/>
+          </a:fontRef>
+        </p:style>
+        <p:txBody>
+          <a:bodyPr rtlCol="0" anchor="ctr"/>
+          <a:lstStyle/>
+          <a:p>
+            <a:pPr algn="ctr"/>
+          </a:p>
+        </p:txBody>
+      </p:sp>
+      <p:pic>
+        <p:nvPicPr>
+          <p:cNvPr id="6" name="Picture 5" descr="focus-refusal.png"/>
+          <p:cNvPicPr>
+            <a:picLocks noChangeAspect="1"/>
+          </p:cNvPicPr>
+          <p:nvPr/>
+        </p:nvPicPr>
+        <p:blipFill>
+          <a:blip r:embed="rId2"/>
+          <a:stretch>
+            <a:fillRect/>
+          </a:stretch>
+        </p:blipFill>
+        <p:spPr>
+          <a:xfrm>
+            <a:off x="640080" y="2609839"/>
+            <a:ext cx="7498079" cy="3147081"/>
+          </a:xfrm>
+          <a:prstGeom prst="rect">
+            <a:avLst/>
+          </a:prstGeom>
+        </p:spPr>
+      </p:pic>
+      <p:sp>
+        <p:nvSpPr>
+          <p:cNvPr id="7" name="TextBox 6"/>
+          <p:cNvSpPr txBox="1"/>
+          <p:nvPr/>
+        </p:nvSpPr>
+        <p:spPr>
+          <a:xfrm>
+            <a:off x="8503919" y="2240280"/>
+            <a:ext cx="3047696" cy="914400"/>
+          </a:xfrm>
+          <a:prstGeom prst="rect">
+            <a:avLst/>
+          </a:prstGeom>
+          <a:noFill/>
+        </p:spPr>
+        <p:txBody>
+          <a:bodyPr wrap="square">
+            <a:spAutoFit/>
+          </a:bodyPr>
+          <a:lstStyle/>
+          <a:p>
+            <a:pPr>
+              <a:spcAft>
+                <a:spcPts val="800"/>
+              </a:spcAft>
+            </a:pPr>
+            <a:r>
+              <a:rPr sz="1500">
                 <a:solidFill>
                   <a:srgbClr val="1F2933"/>
                 </a:solidFill>
                 <a:latin typeface="Calibri"/>
               </a:rPr>
-              <a:t>Claim allocation: sequential payers, p_i = min(A_i, s_i minus cost sharing); exact order search within a layer; greedy and single-policy baselines</a:t>
+              <a:t>•  Observe / Draft / Act switch, insurer-side halt switch, hash-chained audit log</a:t>
             </a:r>
           </a:p>
           <a:p>
             <a:pPr>
               <a:spcAft>
-                <a:spcPts val="1200"/>
+                <a:spcPts val="800"/>
               </a:spcAft>
             </a:pPr>
             <a:r>
-              <a:rPr sz="1300" b="1">
-                <a:solidFill>
-                  <a:srgbClr val="0B6E6E"/>
-                </a:solidFill>
-                <a:latin typeface="Calibri"/>
-              </a:rPr>
-              <a:t>■  </a:t>
-            </a:r>
-            <a:r>
-              <a:rPr sz="1900" b="0">
+              <a:rPr sz="1500">
                 <a:solidFill>
                   <a:srgbClr val="1F2933"/>
                 </a:solidFill>
                 <a:latin typeface="Calibri"/>
               </a:rPr>
-              <a:t>Recourse: smallest legitimate fact changes that flip DENIED to COVERED, Pareto-minimal in (days, money, effort); the event itself never changes</a:t>
-            </a:r>
-          </a:p>
-          <a:p>
-            <a:pPr>
-              <a:spcAft>
-                <a:spcPts val="1200"/>
-              </a:spcAft>
-            </a:pPr>
-            <a:r>
-              <a:rPr sz="1300" b="1">
-                <a:solidFill>
-                  <a:srgbClr val="0B6E6E"/>
-                </a:solidFill>
-                <a:latin typeface="Calibri"/>
-              </a:rPr>
-              <a:t>■  </a:t>
-            </a:r>
-            <a:r>
-              <a:rPr sz="1900" b="0">
-                <a:solidFill>
-                  <a:srgbClr val="1F2933"/>
-                </a:solidFill>
-                <a:latin typeface="Calibri"/>
-              </a:rPr>
-              <a:t>Adjudication twin: every denial ground isolated one clause at a time; readiness score 1 minus the ground weights</a:t>
-            </a:r>
-          </a:p>
-          <a:p>
-            <a:pPr>
-              <a:spcAft>
-                <a:spcPts val="1200"/>
-              </a:spcAft>
-            </a:pPr>
-            <a:r>
-              <a:rPr sz="1300" b="1">
-                <a:solidFill>
-                  <a:srgbClr val="0B6E6E"/>
-                </a:solidFill>
-                <a:latin typeface="Calibri"/>
-              </a:rPr>
-              <a:t>■  </a:t>
-            </a:r>
-            <a:r>
-              <a:rPr sz="1900" b="0">
-                <a:solidFill>
-                  <a:srgbClr val="1F2933"/>
-                </a:solidFill>
-                <a:latin typeface="Calibri"/>
-              </a:rPr>
-              <a:t>Plan selection: weighted set cover under budget as one mixed-integer programme; indemnity plans never overlap</a:t>
-            </a:r>
-          </a:p>
-          <a:p>
-            <a:pPr>
-              <a:spcAft>
-                <a:spcPts val="1200"/>
-              </a:spcAft>
-            </a:pPr>
-            <a:r>
-              <a:rPr sz="1300" b="1">
-                <a:solidFill>
-                  <a:srgbClr val="0B6E6E"/>
-                </a:solidFill>
-                <a:latin typeface="Calibri"/>
-              </a:rPr>
-              <a:t>■  </a:t>
-            </a:r>
-            <a:r>
-              <a:rPr sz="1900" b="0">
-                <a:solidFill>
-                  <a:srgbClr val="1F2933"/>
-                </a:solidFill>
-                <a:latin typeface="Calibri"/>
-              </a:rPr>
-              <a:t>Timeline: every dated event with the money that turns on it</a:t>
-            </a:r>
-          </a:p>
-        </p:txBody>
-      </p:sp>
-      <p:sp>
-        <p:nvSpPr>
-          <p:cNvPr id="5" name="TextBox 4"/>
+              <a:t>•  Uploaded documents are data: hidden instructions are detected and ignored</a:t>
+            </a:r>
+          </a:p>
+        </p:txBody>
+      </p:sp>
+      <p:sp>
+        <p:nvSpPr>
+          <p:cNvPr id="8" name="TextBox 7"/>
           <p:cNvSpPr txBox="1"/>
           <p:nvPr/>
         </p:nvSpPr>
         <p:spPr>
           <a:xfrm>
-            <a:off x="640080" y="6400800"/>
-            <a:ext cx="10972800" cy="320040"/>
+            <a:off x="11094415" y="6400800"/>
+            <a:ext cx="548640" cy="274320"/>
           </a:xfrm>
           <a:prstGeom prst="rect">
             <a:avLst/>
@@ -6410,19 +5869,20 @@
           <a:noFill/>
         </p:spPr>
         <p:txBody>
-          <a:bodyPr wrap="none">
+          <a:bodyPr wrap="square">
             <a:spAutoFit/>
           </a:bodyPr>
           <a:lstStyle/>
           <a:p>
-            <a:r>
-              <a:rPr sz="1100" b="0">
+            <a:pPr algn="r"/>
+            <a:r>
+              <a:rPr sz="1000" b="0">
                 <a:solidFill>
                   <a:srgbClr val="5B6772"/>
                 </a:solidFill>
                 <a:latin typeface="Calibri"/>
               </a:rPr>
-              <a:t>ClauseGuard  |  FinTechathon 2026, Topic D  |  6/10</a:t>
+              <a:t>6/8</a:t>
             </a:r>
           </a:p>
         </p:txBody>
@@ -6454,18 +5914,17 @@
         <p:spPr>
           <a:xfrm>
             <a:off x="0" y="0"/>
-            <a:ext cx="228600" cy="6858000"/>
+            <a:ext cx="164592" cy="6858000"/>
           </a:xfrm>
           <a:prstGeom prst="rect">
             <a:avLst/>
           </a:prstGeom>
           <a:solidFill>
-            <a:srgbClr val="0B6E6E"/>
+            <a:srgbClr val="1E40AF"/>
           </a:solidFill>
           <a:ln>
             <a:noFill/>
           </a:ln>
-          <a:effectLst/>
         </p:spPr>
         <p:style>
           <a:lnRef idx="1">
@@ -6497,8 +5956,8 @@
         </p:nvSpPr>
         <p:spPr>
           <a:xfrm>
-            <a:off x="640080" y="365760"/>
-            <a:ext cx="10972800" cy="914400"/>
+            <a:off x="640080" y="411480"/>
+            <a:ext cx="10911535" cy="548640"/>
           </a:xfrm>
           <a:prstGeom prst="rect">
             <a:avLst/>
@@ -6511,14 +5970,15 @@
           </a:bodyPr>
           <a:lstStyle/>
           <a:p>
-            <a:r>
-              <a:rPr sz="3600" b="1">
+            <a:pPr algn="l"/>
+            <a:r>
+              <a:rPr sz="1300" b="1">
                 <a:solidFill>
-                  <a:srgbClr val="0B6E6E"/>
+                  <a:srgbClr val="1E40AF"/>
                 </a:solidFill>
                 <a:latin typeface="Calibri"/>
               </a:rPr>
-              <a:t>Security by construction</a:t>
+              <a:t>MEASURED, WITH LIMITS</a:t>
             </a:r>
           </a:p>
         </p:txBody>
@@ -6531,8 +5991,8 @@
         </p:nvSpPr>
         <p:spPr>
           <a:xfrm>
-            <a:off x="640080" y="1371600"/>
-            <a:ext cx="10972800" cy="5029200"/>
+            <a:off x="640080" y="868680"/>
+            <a:ext cx="10911535" cy="1097280"/>
           </a:xfrm>
           <a:prstGeom prst="rect">
             <a:avLst/>
@@ -6545,142 +6005,102 @@
           </a:bodyPr>
           <a:lstStyle/>
           <a:p>
-            <a:pPr>
-              <a:spcAft>
-                <a:spcPts val="1200"/>
-              </a:spcAft>
-            </a:pPr>
-            <a:r>
-              <a:rPr sz="1300" b="1">
+            <a:pPr algn="l"/>
+            <a:r>
+              <a:rPr sz="2800" b="1">
                 <a:solidFill>
-                  <a:srgbClr val="0B6E6E"/>
+                  <a:srgbClr val="14213D"/>
                 </a:solidFill>
                 <a:latin typeface="Calibri"/>
               </a:rPr>
-              <a:t>■  </a:t>
-            </a:r>
-            <a:r>
-              <a:rPr sz="1900" b="0">
+              <a:t>Fewer invented denials than general chat models, measured on a public benchmark.</a:t>
+            </a:r>
+          </a:p>
+        </p:txBody>
+      </p:sp>
+      <p:graphicFrame>
+        <p:nvGraphicFramePr>
+          <p:cNvPr id="5" name="Chart 4"/>
+          <p:cNvGraphicFramePr>
+            <a:graphicFrameLocks noGrp="1"/>
+          </p:cNvGraphicFramePr>
+          <p:nvPr/>
+        </p:nvGraphicFramePr>
+        <p:xfrm>
+          <a:off x="640080" y="2057400"/>
+          <a:ext cx="7498079" cy="4251960"/>
+        </p:xfrm>
+        <a:graphic>
+          <a:graphicData uri="http://schemas.openxmlformats.org/drawingml/2006/chart">
+            <c:chart xmlns:c="http://schemas.openxmlformats.org/drawingml/2006/chart" r:id="rId2"/>
+          </a:graphicData>
+        </a:graphic>
+      </p:graphicFrame>
+      <p:sp>
+        <p:nvSpPr>
+          <p:cNvPr id="6" name="TextBox 5"/>
+          <p:cNvSpPr txBox="1"/>
+          <p:nvPr/>
+        </p:nvSpPr>
+        <p:spPr>
+          <a:xfrm>
+            <a:off x="8503919" y="2240280"/>
+            <a:ext cx="3047696" cy="914400"/>
+          </a:xfrm>
+          <a:prstGeom prst="rect">
+            <a:avLst/>
+          </a:prstGeom>
+          <a:noFill/>
+        </p:spPr>
+        <p:txBody>
+          <a:bodyPr wrap="square">
+            <a:spAutoFit/>
+          </a:bodyPr>
+          <a:lstStyle/>
+          <a:p>
+            <a:pPr>
+              <a:spcAft>
+                <a:spcPts val="800"/>
+              </a:spcAft>
+            </a:pPr>
+            <a:r>
+              <a:rPr sz="1500">
                 <a:solidFill>
                   <a:srgbClr val="1F2933"/>
                 </a:solidFill>
                 <a:latin typeface="Calibri"/>
               </a:rPr>
-              <a:t>T0 read own data | T1 compute and draft | T2 submit after a UI click and a server nonce | T3 money and identity: no tool exists, ticket only</a:t>
+              <a:t>•  84.6 % accuracy on 390 benchmark labels; 1.4 % fabricated denials (general models: 2.4 % to 26.6 %)</a:t>
             </a:r>
           </a:p>
           <a:p>
             <a:pPr>
               <a:spcAft>
-                <a:spcPts val="1200"/>
+                <a:spcPts val="800"/>
               </a:spcAft>
             </a:pPr>
             <a:r>
-              <a:rPr sz="1300" b="1">
-                <a:solidFill>
-                  <a:srgbClr val="0B6E6E"/>
-                </a:solidFill>
-                <a:latin typeface="Calibri"/>
-              </a:rPr>
-              <a:t>■  </a:t>
-            </a:r>
-            <a:r>
-              <a:rPr sz="1900" b="0">
+              <a:rPr sz="1500">
                 <a:solidFill>
                   <a:srgbClr val="1F2933"/>
                 </a:solidFill>
                 <a:latin typeface="Calibri"/>
               </a:rPr>
-              <a:t>Enforced in code: clauseguard/security/pep.py, rules R1 to R9; untrusted text never becomes a T2 or T3 argument</a:t>
-            </a:r>
-          </a:p>
-          <a:p>
-            <a:pPr>
-              <a:spcAft>
-                <a:spcPts val="1200"/>
-              </a:spcAft>
-            </a:pPr>
-            <a:r>
-              <a:rPr sz="1300" b="1">
-                <a:solidFill>
-                  <a:srgbClr val="0B6E6E"/>
-                </a:solidFill>
-                <a:latin typeface="Calibri"/>
-              </a:rPr>
-              <a:t>■  </a:t>
-            </a:r>
-            <a:r>
-              <a:rPr sz="1900" b="0">
-                <a:solidFill>
-                  <a:srgbClr val="1F2933"/>
-                </a:solidFill>
-                <a:latin typeface="Calibri"/>
-              </a:rPr>
-              <a:t>Chat attack suite: 0 of 27 attacks had a forbidden effect; 0 of 15 benign requests blocked</a:t>
-            </a:r>
-          </a:p>
-          <a:p>
-            <a:pPr>
-              <a:spcAft>
-                <a:spcPts val="1200"/>
-              </a:spcAft>
-            </a:pPr>
-            <a:r>
-              <a:rPr sz="1300" b="1">
-                <a:solidFill>
-                  <a:srgbClr val="0B6E6E"/>
-                </a:solidFill>
-                <a:latin typeface="Calibri"/>
-              </a:rPr>
-              <a:t>■  </a:t>
-            </a:r>
-            <a:r>
-              <a:rPr sz="1900" b="0">
-                <a:solidFill>
-                  <a:srgbClr val="1F2933"/>
-                </a:solidFill>
-                <a:latin typeface="Calibri"/>
-              </a:rPr>
-              <a:t>Enforcement patched to allow-all: 1 of 27 succeeds; direct probes 0 of 10 with the guard on</a:t>
-            </a:r>
-          </a:p>
-          <a:p>
-            <a:pPr>
-              <a:spcAft>
-                <a:spcPts val="1200"/>
-              </a:spcAft>
-            </a:pPr>
-            <a:r>
-              <a:rPr sz="1300" b="1">
-                <a:solidFill>
-                  <a:srgbClr val="0B6E6E"/>
-                </a:solidFill>
-                <a:latin typeface="Calibri"/>
-              </a:rPr>
-              <a:t>■  </a:t>
-            </a:r>
-            <a:r>
-              <a:rPr sz="1900" b="0">
-                <a:solidFill>
-                  <a:srgbClr val="1F2933"/>
-                </a:solidFill>
-                <a:latin typeface="Calibri"/>
-              </a:rPr>
-              <a:t>Hidden text: white text, tiny font, off-page, annotation 20/20; metadata and image alt 12/20; rendered image 0/20</a:t>
-            </a:r>
-          </a:p>
-        </p:txBody>
-      </p:sp>
-      <p:sp>
-        <p:nvSpPr>
-          <p:cNvPr id="5" name="TextBox 4"/>
+              <a:t>•  33 of 33 scripted claims, 0 of 27 attacks succeeded, 0 of 15 benign requests blocked</a:t>
+            </a:r>
+          </a:p>
+        </p:txBody>
+      </p:sp>
+      <p:sp>
+        <p:nvSpPr>
+          <p:cNvPr id="7" name="TextBox 6"/>
           <p:cNvSpPr txBox="1"/>
           <p:nvPr/>
         </p:nvSpPr>
         <p:spPr>
           <a:xfrm>
-            <a:off x="640080" y="6400800"/>
-            <a:ext cx="10972800" cy="320040"/>
+            <a:off x="11094415" y="6400800"/>
+            <a:ext cx="548640" cy="274320"/>
           </a:xfrm>
           <a:prstGeom prst="rect">
             <a:avLst/>
@@ -6688,19 +6108,20 @@
           <a:noFill/>
         </p:spPr>
         <p:txBody>
-          <a:bodyPr wrap="none">
+          <a:bodyPr wrap="square">
             <a:spAutoFit/>
           </a:bodyPr>
           <a:lstStyle/>
           <a:p>
-            <a:r>
-              <a:rPr sz="1100" b="0">
+            <a:pPr algn="r"/>
+            <a:r>
+              <a:rPr sz="1000" b="0">
                 <a:solidFill>
                   <a:srgbClr val="5B6772"/>
                 </a:solidFill>
                 <a:latin typeface="Calibri"/>
               </a:rPr>
-              <a:t>ClauseGuard  |  FinTechathon 2026, Topic D  |  7/10</a:t>
+              <a:t>7/8</a:t>
             </a:r>
           </a:p>
         </p:txBody>
@@ -6732,18 +6153,17 @@
         <p:spPr>
           <a:xfrm>
             <a:off x="0" y="0"/>
-            <a:ext cx="228600" cy="6858000"/>
+            <a:ext cx="164592" cy="6858000"/>
           </a:xfrm>
           <a:prstGeom prst="rect">
             <a:avLst/>
           </a:prstGeom>
           <a:solidFill>
-            <a:srgbClr val="0B6E6E"/>
+            <a:srgbClr val="1E40AF"/>
           </a:solidFill>
           <a:ln>
             <a:noFill/>
           </a:ln>
-          <a:effectLst/>
         </p:spPr>
         <p:style>
           <a:lnRef idx="1">
@@ -6775,8 +6195,8 @@
         </p:nvSpPr>
         <p:spPr>
           <a:xfrm>
-            <a:off x="640080" y="365760"/>
-            <a:ext cx="10972800" cy="914400"/>
+            <a:off x="640080" y="411480"/>
+            <a:ext cx="10911535" cy="548640"/>
           </a:xfrm>
           <a:prstGeom prst="rect">
             <a:avLst/>
@@ -6789,14 +6209,15 @@
           </a:bodyPr>
           <a:lstStyle/>
           <a:p>
-            <a:r>
-              <a:rPr sz="3600" b="1">
+            <a:pPr algn="l"/>
+            <a:r>
+              <a:rPr sz="1300" b="1">
                 <a:solidFill>
-                  <a:srgbClr val="0B6E6E"/>
+                  <a:srgbClr val="1E40AF"/>
                 </a:solidFill>
                 <a:latin typeface="Calibri"/>
               </a:rPr>
-              <a:t>Results, with their limits</a:t>
+              <a:t>WHAT IS REAL, WHAT IS NEXT</a:t>
             </a:r>
           </a:p>
         </p:txBody>
@@ -6809,8 +6230,8 @@
         </p:nvSpPr>
         <p:spPr>
           <a:xfrm>
-            <a:off x="640080" y="1371600"/>
-            <a:ext cx="10972800" cy="5029200"/>
+            <a:off x="640080" y="868680"/>
+            <a:ext cx="10911535" cy="1097280"/>
           </a:xfrm>
           <a:prstGeom prst="rect">
             <a:avLst/>
@@ -6823,142 +6244,116 @@
           </a:bodyPr>
           <a:lstStyle/>
           <a:p>
-            <a:pPr>
-              <a:spcAft>
-                <a:spcPts val="1200"/>
-              </a:spcAft>
-            </a:pPr>
-            <a:r>
-              <a:rPr sz="1300" b="1">
+            <a:pPr algn="l"/>
+            <a:r>
+              <a:rPr sz="2800" b="1">
                 <a:solidFill>
-                  <a:srgbClr val="0B6E6E"/>
+                  <a:srgbClr val="14213D"/>
                 </a:solidFill>
                 <a:latin typeface="Calibri"/>
               </a:rPr>
-              <a:t>■  </a:t>
-            </a:r>
-            <a:r>
-              <a:rPr sz="1900" b="0">
+              <a:t>Live web app, sandbox insurer, public data — and an honest list of what is not built yet.</a:t>
+            </a:r>
+          </a:p>
+        </p:txBody>
+      </p:sp>
+      <p:sp>
+        <p:nvSpPr>
+          <p:cNvPr id="5" name="TextBox 4"/>
+          <p:cNvSpPr txBox="1"/>
+          <p:nvPr/>
+        </p:nvSpPr>
+        <p:spPr>
+          <a:xfrm>
+            <a:off x="640080" y="2331720"/>
+            <a:ext cx="10911535" cy="1828800"/>
+          </a:xfrm>
+          <a:prstGeom prst="rect">
+            <a:avLst/>
+          </a:prstGeom>
+          <a:noFill/>
+        </p:spPr>
+        <p:txBody>
+          <a:bodyPr wrap="square">
+            <a:spAutoFit/>
+          </a:bodyPr>
+          <a:lstStyle/>
+          <a:p>
+            <a:pPr>
+              <a:spcAft>
+                <a:spcPts val="800"/>
+              </a:spcAft>
+            </a:pPr>
+            <a:r>
+              <a:rPr sz="2000">
                 <a:solidFill>
                   <a:srgbClr val="1F2933"/>
                 </a:solidFill>
                 <a:latin typeface="Calibri"/>
               </a:rPr>
-              <a:t>Scripted tasks 33 of 33; off-script 15 of 15 and 10 of 10 (development sets); blind batch 3 of 14 (out of sample)</a:t>
+              <a:t>•  Real: six insurer wordings, 30 Indonesian product summaries, 834 CMS plans, consumer questions, ombudsman decisions</a:t>
             </a:r>
           </a:p>
           <a:p>
             <a:pPr>
               <a:spcAft>
-                <a:spcPts val="1200"/>
+                <a:spcPts val="800"/>
               </a:spcAft>
             </a:pPr>
             <a:r>
-              <a:rPr sz="1300" b="1">
-                <a:solidFill>
-                  <a:srgbClr val="0B6E6E"/>
-                </a:solidFill>
-                <a:latin typeface="Calibri"/>
-              </a:rPr>
-              <a:t>■  </a:t>
-            </a:r>
-            <a:r>
-              <a:rPr sz="1900" b="0">
+              <a:rPr sz="2000">
                 <a:solidFill>
                   <a:srgbClr val="1F2933"/>
                 </a:solidFill>
                 <a:latin typeface="Calibri"/>
               </a:rPr>
-              <a:t>Paraphrase consistency 20 of 20 with the rule binder, 7 of 8 with the model binder</a:t>
+              <a:t>•  Sandbox: the insurer's desk and the three personas; no real insurer receives a claim</a:t>
             </a:r>
           </a:p>
           <a:p>
             <a:pPr>
               <a:spcAft>
-                <a:spcPts val="1200"/>
+                <a:spcPts val="800"/>
               </a:spcAft>
             </a:pPr>
             <a:r>
-              <a:rPr sz="1300" b="1">
-                <a:solidFill>
-                  <a:srgbClr val="0B6E6E"/>
-                </a:solidFill>
-                <a:latin typeface="Calibri"/>
-              </a:rPr>
-              <a:t>■  </a:t>
-            </a:r>
-            <a:r>
-              <a:rPr sz="1900" b="0">
+              <a:rPr sz="2000">
                 <a:solidFill>
                   <a:srgbClr val="1F2933"/>
                 </a:solidFill>
                 <a:latin typeface="Calibri"/>
               </a:rPr>
-              <a:t>Clarification: asks when it should 87% (26/30), silent when it should 100% (35/35), slot correct 100%</a:t>
+              <a:t>•  Next: a real insurer API, session state that survives restarts, an external red team</a:t>
             </a:r>
           </a:p>
           <a:p>
             <a:pPr>
               <a:spcAft>
-                <a:spcPts val="1200"/>
+                <a:spcPts val="800"/>
               </a:spcAft>
             </a:pPr>
             <a:r>
-              <a:rPr sz="1300" b="1">
-                <a:solidFill>
-                  <a:srgbClr val="0B6E6E"/>
-                </a:solidFill>
-                <a:latin typeface="Calibri"/>
-              </a:rPr>
-              <a:t>■  </a:t>
-            </a:r>
-            <a:r>
-              <a:rPr sz="1900" b="0">
+              <a:rPr sz="2000">
                 <a:solidFill>
                   <a:srgbClr val="1F2933"/>
                 </a:solidFill>
                 <a:latin typeface="Calibri"/>
               </a:rPr>
-              <a:t>Public benchmark: previous in-scope comparison (82.9 vs 87.5) used mismatched item counts and is corrected; held-out accuracy after the extraction fixes is 84.1%, unchanged from before the fixes; baseline comparison on held-out data not completed (API quota)</a:t>
-            </a:r>
-          </a:p>
-          <a:p>
-            <a:pPr>
-              <a:spcAft>
-                <a:spcPts val="1200"/>
-              </a:spcAft>
-            </a:pPr>
-            <a:r>
-              <a:rPr sz="1300" b="1">
-                <a:solidFill>
-                  <a:srgbClr val="0B6E6E"/>
-                </a:solidFill>
-                <a:latin typeface="Calibri"/>
-              </a:rPr>
-              <a:t>■  </a:t>
-            </a:r>
-            <a:r>
-              <a:rPr sz="1900" b="0">
-                <a:solidFill>
-                  <a:srgbClr val="1F2933"/>
-                </a:solidFill>
-                <a:latin typeface="Calibri"/>
-              </a:rPr>
-              <a:t>Recourse: 4 of 6 denied verdicts have a legitimate path to cover. Plan selection: optimiser beats the cheapest plan in 73 of 100 households on the mixed catalogue; identical pick on the single-peril CMS catalogue</a:t>
-            </a:r>
-          </a:p>
-        </p:txBody>
-      </p:sp>
-      <p:sp>
-        <p:nvSpPr>
-          <p:cNvPr id="5" name="TextBox 4"/>
+              <a:t>•  github.com/bungagana/clauseguard · clauseguard-red.vercel.app</a:t>
+            </a:r>
+          </a:p>
+        </p:txBody>
+      </p:sp>
+      <p:sp>
+        <p:nvSpPr>
+          <p:cNvPr id="6" name="TextBox 5"/>
           <p:cNvSpPr txBox="1"/>
           <p:nvPr/>
         </p:nvSpPr>
         <p:spPr>
           <a:xfrm>
-            <a:off x="640080" y="6400800"/>
-            <a:ext cx="10972800" cy="320040"/>
+            <a:off x="11094415" y="6400800"/>
+            <a:ext cx="548640" cy="274320"/>
           </a:xfrm>
           <a:prstGeom prst="rect">
             <a:avLst/>
@@ -6966,297 +6361,20 @@
           <a:noFill/>
         </p:spPr>
         <p:txBody>
-          <a:bodyPr wrap="none">
+          <a:bodyPr wrap="square">
             <a:spAutoFit/>
           </a:bodyPr>
           <a:lstStyle/>
           <a:p>
-            <a:r>
-              <a:rPr sz="1100" b="0">
+            <a:pPr algn="r"/>
+            <a:r>
+              <a:rPr sz="1000" b="0">
                 <a:solidFill>
                   <a:srgbClr val="5B6772"/>
                 </a:solidFill>
                 <a:latin typeface="Calibri"/>
               </a:rPr>
-              <a:t>ClauseGuard  |  FinTechathon 2026, Topic D  |  8/10</a:t>
-            </a:r>
-          </a:p>
-        </p:txBody>
-      </p:sp>
-    </p:spTree>
-  </p:cSld>
-  <p:clrMapOvr>
-    <a:masterClrMapping/>
-  </p:clrMapOvr>
-</p:sld>
-</file>
-
-<file path=ppt/slides/slide9.xml><?xml version="1.0" encoding="utf-8"?>
-<p:sld xmlns:a="http://schemas.openxmlformats.org/drawingml/2006/main" xmlns:p="http://schemas.openxmlformats.org/presentationml/2006/main" xmlns:r="http://schemas.openxmlformats.org/officeDocument/2006/relationships">
-  <p:cSld>
-    <p:spTree>
-      <p:nvGrpSpPr>
-        <p:cNvPr id="1" name=""/>
-        <p:cNvGrpSpPr/>
-        <p:nvPr/>
-      </p:nvGrpSpPr>
-      <p:grpSpPr/>
-      <p:sp>
-        <p:nvSpPr>
-          <p:cNvPr id="2" name="Rectangle 1"/>
-          <p:cNvSpPr/>
-          <p:nvPr/>
-        </p:nvSpPr>
-        <p:spPr>
-          <a:xfrm>
-            <a:off x="0" y="0"/>
-            <a:ext cx="228600" cy="6858000"/>
-          </a:xfrm>
-          <a:prstGeom prst="rect">
-            <a:avLst/>
-          </a:prstGeom>
-          <a:solidFill>
-            <a:srgbClr val="0B6E6E"/>
-          </a:solidFill>
-          <a:ln>
-            <a:noFill/>
-          </a:ln>
-          <a:effectLst/>
-        </p:spPr>
-        <p:style>
-          <a:lnRef idx="1">
-            <a:schemeClr val="accent1"/>
-          </a:lnRef>
-          <a:fillRef idx="3">
-            <a:schemeClr val="accent1"/>
-          </a:fillRef>
-          <a:effectRef idx="2">
-            <a:schemeClr val="accent1"/>
-          </a:effectRef>
-          <a:fontRef idx="minor">
-            <a:schemeClr val="lt1"/>
-          </a:fontRef>
-        </p:style>
-        <p:txBody>
-          <a:bodyPr rtlCol="0" anchor="ctr"/>
-          <a:lstStyle/>
-          <a:p>
-            <a:pPr algn="ctr"/>
-          </a:p>
-        </p:txBody>
-      </p:sp>
-      <p:sp>
-        <p:nvSpPr>
-          <p:cNvPr id="3" name="TextBox 2"/>
-          <p:cNvSpPr txBox="1"/>
-          <p:nvPr/>
-        </p:nvSpPr>
-        <p:spPr>
-          <a:xfrm>
-            <a:off x="640080" y="365760"/>
-            <a:ext cx="10972800" cy="914400"/>
-          </a:xfrm>
-          <a:prstGeom prst="rect">
-            <a:avLst/>
-          </a:prstGeom>
-          <a:noFill/>
-        </p:spPr>
-        <p:txBody>
-          <a:bodyPr wrap="square">
-            <a:spAutoFit/>
-          </a:bodyPr>
-          <a:lstStyle/>
-          <a:p>
-            <a:r>
-              <a:rPr sz="3600" b="1">
-                <a:solidFill>
-                  <a:srgbClr val="0B6E6E"/>
-                </a:solidFill>
-                <a:latin typeface="Calibri"/>
-              </a:rPr>
-              <a:t>Demo, from question to decision</a:t>
-            </a:r>
-          </a:p>
-        </p:txBody>
-      </p:sp>
-      <p:sp>
-        <p:nvSpPr>
-          <p:cNvPr id="4" name="TextBox 3"/>
-          <p:cNvSpPr txBox="1"/>
-          <p:nvPr/>
-        </p:nvSpPr>
-        <p:spPr>
-          <a:xfrm>
-            <a:off x="640080" y="1371600"/>
-            <a:ext cx="10972800" cy="5029200"/>
-          </a:xfrm>
-          <a:prstGeom prst="rect">
-            <a:avLst/>
-          </a:prstGeom>
-          <a:noFill/>
-        </p:spPr>
-        <p:txBody>
-          <a:bodyPr wrap="square">
-            <a:spAutoFit/>
-          </a:bodyPr>
-          <a:lstStyle/>
-          <a:p>
-            <a:pPr>
-              <a:spcAft>
-                <a:spcPts val="1200"/>
-              </a:spcAft>
-            </a:pPr>
-            <a:r>
-              <a:rPr sz="1300" b="1">
-                <a:solidFill>
-                  <a:srgbClr val="0B6E6E"/>
-                </a:solidFill>
-                <a:latin typeface="Calibri"/>
-              </a:rPr>
-              <a:t>■  </a:t>
-            </a:r>
-            <a:r>
-              <a:rPr sz="1900" b="0">
-                <a:solidFill>
-                  <a:srgbClr val="1F2933"/>
-                </a:solidFill>
-                <a:latin typeface="Calibri"/>
-              </a:rPr>
-              <a:t>Rizky, dengue, three days: covered Rp 1.5 million, filing deadline, the clause; one question (partner hospital?) and the BPJS answer follows</a:t>
-            </a:r>
-          </a:p>
-          <a:p>
-            <a:pPr>
-              <a:spcAft>
-                <a:spcPts val="1200"/>
-              </a:spcAft>
-            </a:pPr>
-            <a:r>
-              <a:rPr sz="1300" b="1">
-                <a:solidFill>
-                  <a:srgbClr val="0B6E6E"/>
-                </a:solidFill>
-                <a:latin typeface="Calibri"/>
-              </a:rPr>
-              <a:t>■  </a:t>
-            </a:r>
-            <a:r>
-              <a:rPr sz="1900" b="0">
-                <a:solidFill>
-                  <a:srgbClr val="1F2933"/>
-                </a:solidFill>
-                <a:latin typeface="Calibri"/>
-              </a:rPr>
-              <a:t>Four hospital documents uploaded at once: read, matched to Sompo's list, bill Rp 2.6 million taken from the invoice; the Sompo claim form appears, downloadable as PDF</a:t>
-            </a:r>
-          </a:p>
-          <a:p>
-            <a:pPr>
-              <a:spcAft>
-                <a:spcPts val="1200"/>
-              </a:spcAft>
-            </a:pPr>
-            <a:r>
-              <a:rPr sz="1300" b="1">
-                <a:solidFill>
-                  <a:srgbClr val="0B6E6E"/>
-                </a:solidFill>
-                <a:latin typeface="Calibri"/>
-              </a:rPr>
-              <a:t>■  </a:t>
-            </a:r>
-            <a:r>
-              <a:rPr sz="1900" b="0">
-                <a:solidFill>
-                  <a:srgbClr val="1F2933"/>
-                </a:solidFill>
-                <a:latin typeface="Calibri"/>
-              </a:rPr>
-              <a:t>Confirm: the claim and its attachments reach the insurer's desk; approved there with a note; the customer's digest shows the decision</a:t>
-            </a:r>
-          </a:p>
-          <a:p>
-            <a:pPr>
-              <a:spcAft>
-                <a:spcPts val="1200"/>
-              </a:spcAft>
-            </a:pPr>
-            <a:r>
-              <a:rPr sz="1300" b="1">
-                <a:solidFill>
-                  <a:srgbClr val="0B6E6E"/>
-                </a:solidFill>
-                <a:latin typeface="Calibri"/>
-              </a:rPr>
-              <a:t>■  </a:t>
-            </a:r>
-            <a:r>
-              <a:rPr sz="1900" b="0">
-                <a:solidFill>
-                  <a:srgbClr val="1F2933"/>
-                </a:solidFill>
-                <a:latin typeface="Calibri"/>
-              </a:rPr>
-              <a:t>Dewi, motorbike crash with four policies: who pays first, the expired licence, what-if with a valid one</a:t>
-            </a:r>
-          </a:p>
-          <a:p>
-            <a:pPr>
-              <a:spcAft>
-                <a:spcPts val="1200"/>
-              </a:spcAft>
-            </a:pPr>
-            <a:r>
-              <a:rPr sz="1300" b="1">
-                <a:solidFill>
-                  <a:srgbClr val="0B6E6E"/>
-                </a:solidFill>
-                <a:latin typeface="Calibri"/>
-              </a:rPr>
-              <a:t>■  </a:t>
-            </a:r>
-            <a:r>
-              <a:rPr sz="1900" b="0">
-                <a:solidFill>
-                  <a:srgbClr val="1F2933"/>
-                </a:solidFill>
-                <a:latin typeface="Calibri"/>
-              </a:rPr>
-              <a:t>Attack: payout-account change goes to a ticket, nothing changes; the audit chain verifies and a tampered copy breaks</a:t>
-            </a:r>
-          </a:p>
-        </p:txBody>
-      </p:sp>
-      <p:sp>
-        <p:nvSpPr>
-          <p:cNvPr id="5" name="TextBox 4"/>
-          <p:cNvSpPr txBox="1"/>
-          <p:nvPr/>
-        </p:nvSpPr>
-        <p:spPr>
-          <a:xfrm>
-            <a:off x="640080" y="6400800"/>
-            <a:ext cx="10972800" cy="320040"/>
-          </a:xfrm>
-          <a:prstGeom prst="rect">
-            <a:avLst/>
-          </a:prstGeom>
-          <a:noFill/>
-        </p:spPr>
-        <p:txBody>
-          <a:bodyPr wrap="none">
-            <a:spAutoFit/>
-          </a:bodyPr>
-          <a:lstStyle/>
-          <a:p>
-            <a:r>
-              <a:rPr sz="1100" b="0">
-                <a:solidFill>
-                  <a:srgbClr val="5B6772"/>
-                </a:solidFill>
-                <a:latin typeface="Calibri"/>
-              </a:rPr>
-              <a:t>ClauseGuard  |  FinTechathon 2026, Topic D  |  9/10</a:t>
+              <a:t>8/8</a:t>
             </a:r>
           </a:p>
         </p:txBody>
